--- a/data-eng/decks/w3d3s3.pptx
+++ b/data-eng/decks/w3d3s3.pptx
@@ -3100,7 +3100,7 @@
       <p:grpSpPr/>
       <p:sp>
         <p:nvSpPr>
-          <p:cNvPr id="2" name="Oval 1"/>
+          <p:cNvPr id="2" name="deckgen:decor"/>
           <p:cNvSpPr/>
           <p:nvPr/>
         </p:nvSpPr>
@@ -3130,7 +3130,7 @@
       </p:sp>
       <p:sp>
         <p:nvSpPr>
-          <p:cNvPr id="3" name="Oval 2"/>
+          <p:cNvPr id="3" name="deckgen:decor"/>
           <p:cNvSpPr/>
           <p:nvPr/>
         </p:nvSpPr>
@@ -3160,7 +3160,7 @@
       </p:sp>
       <p:sp>
         <p:nvSpPr>
-          <p:cNvPr id="4" name="Oval 3"/>
+          <p:cNvPr id="4" name="deckgen:decor"/>
           <p:cNvSpPr/>
           <p:nvPr/>
         </p:nvSpPr>
@@ -3190,7 +3190,7 @@
       </p:sp>
       <p:sp>
         <p:nvSpPr>
-          <p:cNvPr id="5" name="Rectangle 4"/>
+          <p:cNvPr id="5" name="deckgen:decor"/>
           <p:cNvSpPr/>
           <p:nvPr/>
         </p:nvSpPr>
@@ -3220,7 +3220,7 @@
       </p:sp>
       <p:sp>
         <p:nvSpPr>
-          <p:cNvPr id="6" name="Oval 5"/>
+          <p:cNvPr id="6" name="deckgen:decor"/>
           <p:cNvSpPr/>
           <p:nvPr/>
         </p:nvSpPr>
@@ -3250,7 +3250,7 @@
       </p:sp>
       <p:sp>
         <p:nvSpPr>
-          <p:cNvPr id="7" name="Oval 6"/>
+          <p:cNvPr id="7" name="deckgen:decor"/>
           <p:cNvSpPr/>
           <p:nvPr/>
         </p:nvSpPr>
@@ -3280,7 +3280,7 @@
       </p:sp>
       <p:sp>
         <p:nvSpPr>
-          <p:cNvPr id="8" name="Oval 7"/>
+          <p:cNvPr id="8" name="deckgen:decor"/>
           <p:cNvSpPr/>
           <p:nvPr/>
         </p:nvSpPr>
@@ -3310,7 +3310,7 @@
       </p:sp>
       <p:sp>
         <p:nvSpPr>
-          <p:cNvPr id="9" name="Oval 8"/>
+          <p:cNvPr id="9" name="deckgen:decor"/>
           <p:cNvSpPr/>
           <p:nvPr/>
         </p:nvSpPr>
@@ -3340,7 +3340,7 @@
       </p:sp>
       <p:sp>
         <p:nvSpPr>
-          <p:cNvPr id="10" name="Rectangle 9"/>
+          <p:cNvPr id="10" name="deckgen:decor"/>
           <p:cNvSpPr/>
           <p:nvPr/>
         </p:nvSpPr>
@@ -3618,7 +3618,7 @@
       <p:grpSpPr/>
       <p:sp>
         <p:nvSpPr>
-          <p:cNvPr id="2" name="Oval 1"/>
+          <p:cNvPr id="2" name="deckgen:decor"/>
           <p:cNvSpPr/>
           <p:nvPr/>
         </p:nvSpPr>
@@ -3648,7 +3648,7 @@
       </p:sp>
       <p:sp>
         <p:nvSpPr>
-          <p:cNvPr id="3" name="Oval 2"/>
+          <p:cNvPr id="3" name="deckgen:decor"/>
           <p:cNvSpPr/>
           <p:nvPr/>
         </p:nvSpPr>
@@ -3678,7 +3678,7 @@
       </p:sp>
       <p:sp>
         <p:nvSpPr>
-          <p:cNvPr id="4" name="Oval 3"/>
+          <p:cNvPr id="4" name="deckgen:decor"/>
           <p:cNvSpPr/>
           <p:nvPr/>
         </p:nvSpPr>
@@ -3959,7 +3959,7 @@
                 <a:ea typeface="Pretendard"/>
                 <a:cs typeface="Pretendard"/>
               </a:rPr>
-              <a:t>events.parquet 가 생겼고 CSV 보다 확연히 작다</a:t>
+              <a:t>events.parquet 9.8M — CSV 41M 의 24.2%(4.1배)</a:t>
             </a:r>
           </a:p>
         </p:txBody>
@@ -4105,7 +4105,7 @@
                 <a:ea typeface="Pretendard"/>
                 <a:cs typeface="Pretendard"/>
               </a:rPr>
-              <a:t>같은 집계 질의가 Parquet 에서 더 빠르다(3회 평균)</a:t>
+              <a:t>같은 집계 질의가 Parquet 에서 수십 배 빠르다(30~60배)</a:t>
             </a:r>
           </a:p>
         </p:txBody>
@@ -4251,7 +4251,7 @@
                 <a:ea typeface="Pretendard"/>
                 <a:cs typeface="Pretendard"/>
               </a:rPr>
-              <a:t>Parquet 는 한 열만 읽을 때 눈에 띄게 빠르고, CSV 는 차이가 작다</a:t>
+              <a:t>count(*) 가 한 열과 같거나 빠른 이유를 말할 수 있다</a:t>
             </a:r>
           </a:p>
         </p:txBody>
@@ -4397,7 +4397,7 @@
                 <a:ea typeface="Pretendard"/>
                 <a:cs typeface="Pretendard"/>
               </a:rPr>
-              <a:t>압축 3종 중 zstd 가 대체로 가장 작다</a:t>
+              <a:t>다섯 열은 한 열의 4~8배 · CSV 는 차이가 작다</a:t>
             </a:r>
           </a:p>
         </p:txBody>
@@ -4543,7 +4543,7 @@
                 <a:ea typeface="Pretendard"/>
                 <a:cs typeface="Pretendard"/>
               </a:rPr>
-              <a:t>Directory is not empty 를 봤고 OVERWRITE_OR_IGNORE 로 해결했다</a:t>
+              <a:t>zstd 9.8 · snappy 15.9 · gzip 10.6 MB, 기본은 snappy</a:t>
             </a:r>
           </a:p>
         </p:txBody>
@@ -4689,7 +4689,7 @@
                 <a:ea typeface="Pretendard"/>
                 <a:cs typeface="Pretendard"/>
               </a:rPr>
-              <a:t>실측 기록 표에 배율과 결론 한 문장을 적었다</a:t>
+              <a:t>not empty! 를 봤고, 실측기록_3-3.md 를 적었다</a:t>
             </a:r>
           </a:p>
         </p:txBody>
@@ -4826,7 +4826,7 @@
       <p:grpSpPr/>
       <p:sp>
         <p:nvSpPr>
-          <p:cNvPr id="2" name="Oval 1"/>
+          <p:cNvPr id="2" name="deckgen:decor"/>
           <p:cNvSpPr/>
           <p:nvPr/>
         </p:nvSpPr>
@@ -4856,7 +4856,7 @@
       </p:sp>
       <p:sp>
         <p:nvSpPr>
-          <p:cNvPr id="3" name="Oval 2"/>
+          <p:cNvPr id="3" name="deckgen:decor"/>
           <p:cNvSpPr/>
           <p:nvPr/>
         </p:nvSpPr>
@@ -5032,7 +5032,7 @@
                 <a:ea typeface="Pretendard"/>
                 <a:cs typeface="Pretendard"/>
               </a:rPr>
-              <a:t>DuckDB 문법을 한 장으로 정리하고, 실측 수치를 옆 사람과 비교합니다</a:t>
+              <a:t>DuckDB 문법을 한 장으로 정리하고, 실측 수치를 채팅에 올려 비교합니다</a:t>
             </a:r>
           </a:p>
         </p:txBody>
@@ -5264,7 +5264,7 @@
                 <a:ea typeface="Pretendard"/>
                 <a:cs typeface="Pretendard"/>
               </a:rPr>
-              <a:t>실측 수치 공유 — SSD·HDD 차이</a:t>
+              <a:t>실측 수치 공유 — 채팅으로</a:t>
             </a:r>
           </a:p>
         </p:txBody>
@@ -5496,7 +5496,7 @@
                 <a:ea typeface="Pretendard"/>
                 <a:cs typeface="Pretendard"/>
               </a:rPr>
-              <a:t>3-4 DuckDB 데이터 분석 예고</a:t>
+              <a:t>3-4 준비 — 파일 넷 확인</a:t>
             </a:r>
           </a:p>
         </p:txBody>
@@ -5608,7 +5608,7 @@
                 <a:ea typeface="Pretendard"/>
                 <a:cs typeface="Pretendard"/>
               </a:rPr>
-              <a:t>실측 기록 표(배율 3개 · 압축 3종)</a:t>
+              <a:t>실측기록_3-3.md · events.parquet</a:t>
             </a:r>
           </a:p>
         </p:txBody>
@@ -5633,7 +5633,7 @@
       <p:grpSpPr/>
       <p:sp>
         <p:nvSpPr>
-          <p:cNvPr id="2" name="Oval 1"/>
+          <p:cNvPr id="2" name="deckgen:decor"/>
           <p:cNvSpPr/>
           <p:nvPr/>
         </p:nvSpPr>
@@ -5663,7 +5663,7 @@
       </p:sp>
       <p:sp>
         <p:nvSpPr>
-          <p:cNvPr id="3" name="Oval 2"/>
+          <p:cNvPr id="3" name="deckgen:decor"/>
           <p:cNvSpPr/>
           <p:nvPr/>
         </p:nvSpPr>
@@ -5693,7 +5693,7 @@
       </p:sp>
       <p:sp>
         <p:nvSpPr>
-          <p:cNvPr id="4" name="Oval 3"/>
+          <p:cNvPr id="4" name="deckgen:decor"/>
           <p:cNvSpPr/>
           <p:nvPr/>
         </p:nvSpPr>
@@ -5974,7 +5974,7 @@
                 <a:ea typeface="Pretendard"/>
                 <a:cs typeface="Pretendard"/>
               </a:rPr>
-              <a:t>COPY 구문으로 events.csv 를 zstd 압축 Parquet 로 변환한다</a:t>
+              <a:t>speed.py 에 이어 붙이며 COPY 로 zstd Parquet 를 만든다</a:t>
             </a:r>
           </a:p>
         </p:txBody>
@@ -6120,7 +6120,7 @@
                 <a:ea typeface="Pretendard"/>
                 <a:cs typeface="Pretendard"/>
               </a:rPr>
-              <a:t>파일 크기 배율과 같은 질의의 속도 배율을 3회 평균으로 잰다</a:t>
+              <a:t>크기 배율과 같은 질의의 속도 배율을 3회 평균으로 잰다</a:t>
             </a:r>
           </a:p>
         </p:txBody>
@@ -6266,7 +6266,7 @@
                 <a:ea typeface="Pretendard"/>
                 <a:cs typeface="Pretendard"/>
               </a:rPr>
-              <a:t>한 열만 읽기 vs 전부 읽기로 「필요한 열만 읽는다」를 검증한다</a:t>
+              <a:t>count(*) 비교가 거꾸로 나오는 이유를 보고 다섯 열로 다시 잰다</a:t>
             </a:r>
           </a:p>
         </p:txBody>
@@ -6487,7 +6487,7 @@
                 <a:ea typeface="Pretendard"/>
                 <a:cs typeface="Pretendard"/>
               </a:rPr>
-              <a:t>잰 수치는 실측 기록 표에 적어 정리·회고에서 옆 사람과 비교합니다</a:t>
+              <a:t>잰 수치는 실측기록_3-3.md 에 적어 정리·회고에서 채팅으로 비교합니다</a:t>
             </a:r>
           </a:p>
         </p:txBody>
@@ -6624,7 +6624,7 @@
       <p:grpSpPr/>
       <p:sp>
         <p:nvSpPr>
-          <p:cNvPr id="2" name="Oval 1"/>
+          <p:cNvPr id="2" name="deckgen:decor"/>
           <p:cNvSpPr/>
           <p:nvPr/>
         </p:nvSpPr>
@@ -6654,7 +6654,7 @@
       </p:sp>
       <p:sp>
         <p:nvSpPr>
-          <p:cNvPr id="3" name="Oval 2"/>
+          <p:cNvPr id="3" name="deckgen:decor"/>
           <p:cNvSpPr/>
           <p:nvPr/>
         </p:nvSpPr>
@@ -6684,7 +6684,7 @@
       </p:sp>
       <p:sp>
         <p:nvSpPr>
-          <p:cNvPr id="4" name="Oval 3"/>
+          <p:cNvPr id="4" name="deckgen:decor"/>
           <p:cNvSpPr/>
           <p:nvPr/>
         </p:nvSpPr>
@@ -6860,7 +6860,7 @@
                 <a:ea typeface="Pretendard"/>
                 <a:cs typeface="Pretendard"/>
               </a:rPr>
-              <a:t>앞 시간의 events.csv 와 bench 함수(3회 평균)를 그대로 씁니다</a:t>
+              <a:t>speed.py 한 파일에 1~6단계를 이어 붙이고 매번 python3 speed.py — bench() 는 3단계에서 정의</a:t>
             </a:r>
           </a:p>
         </p:txBody>
@@ -7006,7 +7006,7 @@
                 <a:ea typeface="Pretendard"/>
                 <a:cs typeface="Pretendard"/>
               </a:rPr>
-              <a:t>events.parquet</a:t>
+              <a:t>speed.py 시작</a:t>
             </a:r>
           </a:p>
           <a:p>
@@ -7170,7 +7170,7 @@
                 <a:ea typeface="Pretendard"/>
                 <a:cs typeface="Pretendard"/>
               </a:rPr>
-              <a:t>getsize</a:t>
+              <a:t>4.1배 작아짐</a:t>
             </a:r>
           </a:p>
           <a:p>
@@ -7188,7 +7188,7 @@
                 <a:ea typeface="Pretendard"/>
                 <a:cs typeface="Pretendard"/>
               </a:rPr>
-              <a:t>bench 3회 평균</a:t>
+              <a:t>질의 30~60배</a:t>
             </a:r>
           </a:p>
         </p:txBody>
@@ -7334,7 +7334,7 @@
                 <a:ea typeface="Pretendard"/>
                 <a:cs typeface="Pretendard"/>
               </a:rPr>
-              <a:t>한 열만 vs</a:t>
+              <a:t>count(*) 함정</a:t>
             </a:r>
           </a:p>
           <a:p>
@@ -7352,7 +7352,7 @@
                 <a:ea typeface="Pretendard"/>
                 <a:cs typeface="Pretendard"/>
               </a:rPr>
-              <a:t>전부 읽기</a:t>
+              <a:t>→ 다섯 열</a:t>
             </a:r>
           </a:p>
         </p:txBody>
@@ -7662,7 +7662,7 @@
                 <a:ea typeface="Pretendard"/>
                 <a:cs typeface="Pretendard"/>
               </a:rPr>
-              <a:t>표에 배율</a:t>
+              <a:t>실측기록_3-3.md</a:t>
             </a:r>
           </a:p>
           <a:p>
@@ -7680,7 +7680,7 @@
                 <a:ea typeface="Pretendard"/>
                 <a:cs typeface="Pretendard"/>
               </a:rPr>
-              <a:t>결론 한 문장</a:t>
+              <a:t>편집기로</a:t>
             </a:r>
           </a:p>
         </p:txBody>
@@ -7817,7 +7817,7 @@
       <p:grpSpPr/>
       <p:sp>
         <p:nvSpPr>
-          <p:cNvPr id="2" name="Oval 1"/>
+          <p:cNvPr id="2" name="deckgen:decor"/>
           <p:cNvSpPr/>
           <p:nvPr/>
         </p:nvSpPr>
@@ -7847,7 +7847,7 @@
       </p:sp>
       <p:sp>
         <p:nvSpPr>
-          <p:cNvPr id="3" name="Oval 2"/>
+          <p:cNvPr id="3" name="deckgen:decor"/>
           <p:cNvSpPr/>
           <p:nvPr/>
         </p:nvSpPr>
@@ -7877,7 +7877,7 @@
       </p:sp>
       <p:sp>
         <p:nvSpPr>
-          <p:cNvPr id="4" name="Oval 3"/>
+          <p:cNvPr id="4" name="deckgen:decor"/>
           <p:cNvSpPr/>
           <p:nvPr/>
         </p:nvSpPr>
@@ -8468,7 +8468,7 @@
                 <a:ea typeface="Pretendard"/>
                 <a:cs typeface="Pretendard"/>
               </a:rPr>
-              <a:t>「변환 완료」· 파일 생김</a:t>
+              <a:t>「변환 완료」</a:t>
             </a:r>
           </a:p>
         </p:txBody>
@@ -8693,7 +8693,25 @@
                 <a:ea typeface="Pretendard"/>
                 <a:cs typeface="Pretendard"/>
               </a:rPr>
-              <a:t>MB 와 배율</a:t>
+              <a:t>41M → 9.8M</a:t>
+            </a:r>
+          </a:p>
+          <a:p>
+            <a:pPr algn="ctr">
+              <a:lnSpc>
+                <a:spcPct val="115000"/>
+              </a:lnSpc>
+            </a:pPr>
+            <a:r>
+              <a:rPr sz="1875" b="0">
+                <a:solidFill>
+                  <a:srgbClr val="3D3D3D"/>
+                </a:solidFill>
+                <a:latin typeface="Pretendard"/>
+                <a:ea typeface="Pretendard"/>
+                <a:cs typeface="Pretendard"/>
+              </a:rPr>
+              <a:t>24.2% · 4.1배</a:t>
             </a:r>
           </a:p>
         </p:txBody>
@@ -8843,7 +8861,7 @@
                 <a:ea typeface="Pretendard"/>
                 <a:cs typeface="Pretendard"/>
               </a:rPr>
-              <a:t>bench(sql, rounds=3) — duckdb.sql(sql).fetchall()</a:t>
+              <a:t>def bench(sql, rounds=3) — 3단계에서 정의</a:t>
             </a:r>
           </a:p>
         </p:txBody>
@@ -8918,7 +8936,7 @@
                 <a:ea typeface="Pretendard"/>
                 <a:cs typeface="Pretendard"/>
               </a:rPr>
-              <a:t>초 단위 평균</a:t>
+              <a:t>4~6단계도 쓴다</a:t>
             </a:r>
           </a:p>
         </p:txBody>
@@ -9143,7 +9161,25 @@
                 <a:ea typeface="Pretendard"/>
                 <a:cs typeface="Pretendard"/>
               </a:rPr>
-              <a:t>CSV 와 Parquet 각각</a:t>
+              <a:t>Parquet 30~60배</a:t>
+            </a:r>
+          </a:p>
+          <a:p>
+            <a:pPr algn="ctr">
+              <a:lnSpc>
+                <a:spcPct val="115000"/>
+              </a:lnSpc>
+            </a:pPr>
+            <a:r>
+              <a:rPr sz="1875" b="0">
+                <a:solidFill>
+                  <a:srgbClr val="3D3D3D"/>
+                </a:solidFill>
+                <a:latin typeface="Pretendard"/>
+                <a:ea typeface="Pretendard"/>
+                <a:cs typeface="Pretendard"/>
+              </a:rPr>
+              <a:t>빠름</a:t>
             </a:r>
           </a:p>
         </p:txBody>
@@ -9184,7 +9220,7 @@
                 <a:ea typeface="Pretendard"/>
                 <a:cs typeface="Pretendard"/>
               </a:rPr>
-              <a:t>한 번만 재면 우연이 섞인다 — bench 는 perf_counter 로 3회 재서 평균을 돌려준다</a:t>
+              <a:t>1000분의 몇 초를 재니 흔들리는 것이 정상 — 화면 예: CSV 0.228 초 vs Parquet 0.007 초, 30.8배</a:t>
             </a:r>
           </a:p>
         </p:txBody>
@@ -9321,7 +9357,7 @@
       <p:grpSpPr/>
       <p:sp>
         <p:nvSpPr>
-          <p:cNvPr id="2" name="Oval 1"/>
+          <p:cNvPr id="2" name="deckgen:decor"/>
           <p:cNvSpPr/>
           <p:nvPr/>
         </p:nvSpPr>
@@ -9351,7 +9387,7 @@
       </p:sp>
       <p:sp>
         <p:nvSpPr>
-          <p:cNvPr id="3" name="Oval 2"/>
+          <p:cNvPr id="3" name="deckgen:decor"/>
           <p:cNvSpPr/>
           <p:nvPr/>
         </p:nvSpPr>
@@ -9381,7 +9417,7 @@
       </p:sp>
       <p:sp>
         <p:nvSpPr>
-          <p:cNvPr id="4" name="Oval 3"/>
+          <p:cNvPr id="4" name="deckgen:decor"/>
           <p:cNvSpPr/>
           <p:nvPr/>
         </p:nvSpPr>
@@ -9445,7 +9481,7 @@
                 <a:ea typeface="Pretendard"/>
                 <a:cs typeface="Pretendard"/>
               </a:rPr>
-              <a:t>4단계</a:t>
+              <a:t>4단계 · 일부러 틀린 비교부터</a:t>
             </a:r>
           </a:p>
         </p:txBody>
@@ -9486,7 +9522,7 @@
                 <a:ea typeface="Pretendard"/>
                 <a:cs typeface="Pretendard"/>
               </a:rPr>
-              <a:t>왜 빠른가 — 한 열만 읽기 vs 전부 읽기</a:t>
+              <a:t>「전부 읽기」가 더 빠르다? — 측정 방법을 의심</a:t>
             </a:r>
           </a:p>
         </p:txBody>
@@ -9523,100 +9559,18 @@
       </p:sp>
       <p:sp>
         <p:nvSpPr>
-          <p:cNvPr id="8" name="TextBox 7"/>
-          <p:cNvSpPr txBox="1"/>
-          <p:nvPr/>
-        </p:nvSpPr>
-        <p:spPr>
-          <a:xfrm>
-            <a:off x="1143000" y="2857500"/>
-            <a:ext cx="7372350" cy="533400"/>
-          </a:xfrm>
-          <a:prstGeom prst="rect">
-            <a:avLst/>
-          </a:prstGeom>
-          <a:noFill/>
-        </p:spPr>
-        <p:txBody>
-          <a:bodyPr wrap="square" lIns="0" rIns="0" tIns="0" bIns="0" anchor="t">
-            <a:spAutoFit/>
-          </a:bodyPr>
-          <a:lstStyle/>
-          <a:p>
-            <a:pPr algn="l">
-              <a:lnSpc>
-                <a:spcPct val="110000"/>
-              </a:lnSpc>
-            </a:pPr>
-            <a:r>
-              <a:rPr sz="3150" b="1">
-                <a:solidFill>
-                  <a:srgbClr val="0D2B5E"/>
-                </a:solidFill>
-                <a:latin typeface="Pretendard"/>
-                <a:ea typeface="Pretendard"/>
-                <a:cs typeface="Pretendard"/>
-              </a:rPr>
-              <a:t>Parquet</a:t>
-            </a:r>
-          </a:p>
-        </p:txBody>
-      </p:sp>
-      <p:sp>
-        <p:nvSpPr>
-          <p:cNvPr id="9" name="TextBox 8"/>
-          <p:cNvSpPr txBox="1"/>
-          <p:nvPr/>
-        </p:nvSpPr>
-        <p:spPr>
-          <a:xfrm>
-            <a:off x="1143000" y="3467100"/>
-            <a:ext cx="7372350" cy="876300"/>
-          </a:xfrm>
-          <a:prstGeom prst="rect">
-            <a:avLst/>
-          </a:prstGeom>
-          <a:noFill/>
-        </p:spPr>
-        <p:txBody>
-          <a:bodyPr wrap="square" lIns="0" rIns="0" tIns="0" bIns="0" anchor="t">
-            <a:spAutoFit/>
-          </a:bodyPr>
-          <a:lstStyle/>
-          <a:p>
-            <a:pPr algn="l">
-              <a:lnSpc>
-                <a:spcPct val="146000"/>
-              </a:lnSpc>
-            </a:pPr>
-            <a:r>
-              <a:rPr sz="2250" b="0">
-                <a:solidFill>
-                  <a:srgbClr val="3D3D3D"/>
-                </a:solidFill>
-                <a:latin typeface="Pretendard"/>
-                <a:ea typeface="Pretendard"/>
-                <a:cs typeface="Pretendard"/>
-              </a:rPr>
-              <a:t>한 열만 쓸 때가 눈에 띄게 빠르다</a:t>
-            </a:r>
-          </a:p>
-        </p:txBody>
-      </p:sp>
-      <p:sp>
-        <p:nvSpPr>
-          <p:cNvPr id="10" name="Rounded Rectangle 9"/>
-          <p:cNvSpPr/>
-          <p:nvPr/>
-        </p:nvSpPr>
-        <p:spPr>
-          <a:xfrm>
-            <a:off x="1143000" y="4610100"/>
-            <a:ext cx="7372350" cy="2857500"/>
+          <p:cNvPr id="8" name="Rounded Rectangle 7"/>
+          <p:cNvSpPr/>
+          <p:nvPr/>
+        </p:nvSpPr>
+        <p:spPr>
+          <a:xfrm>
+            <a:off x="1143000" y="2933700"/>
+            <a:ext cx="16002000" cy="1000125"/>
           </a:xfrm>
           <a:prstGeom prst="roundRect">
             <a:avLst>
-              <a:gd name="adj" fmla="val 1666"/>
+              <a:gd name="adj" fmla="val 4761"/>
             </a:avLst>
           </a:prstGeom>
           <a:solidFill>
@@ -9639,16 +9593,16 @@
       </p:sp>
       <p:sp>
         <p:nvSpPr>
-          <p:cNvPr id="11" name="Rectangle 10"/>
-          <p:cNvSpPr/>
-          <p:nvPr/>
-        </p:nvSpPr>
-        <p:spPr>
-          <a:xfrm>
-            <a:off x="1390650" y="4838700"/>
-            <a:ext cx="2152015" cy="599122"/>
-          </a:xfrm>
-          <a:prstGeom prst="rect">
+          <p:cNvPr id="9" name="Oval 8"/>
+          <p:cNvSpPr/>
+          <p:nvPr/>
+        </p:nvSpPr>
+        <p:spPr>
+          <a:xfrm>
+            <a:off x="1447800" y="3138488"/>
+            <a:ext cx="590550" cy="590550"/>
+          </a:xfrm>
+          <a:prstGeom prst="ellipse">
             <a:avLst/>
           </a:prstGeom>
           <a:solidFill>
@@ -9669,41 +9623,123 @@
       </p:sp>
       <p:sp>
         <p:nvSpPr>
+          <p:cNvPr id="10" name="TextBox 9"/>
+          <p:cNvSpPr txBox="1"/>
+          <p:nvPr/>
+        </p:nvSpPr>
+        <p:spPr>
+          <a:xfrm>
+            <a:off x="1447800" y="3290888"/>
+            <a:ext cx="590550" cy="323850"/>
+          </a:xfrm>
+          <a:prstGeom prst="rect">
+            <a:avLst/>
+          </a:prstGeom>
+          <a:noFill/>
+        </p:spPr>
+        <p:txBody>
+          <a:bodyPr wrap="square" lIns="0" rIns="0" tIns="0" bIns="0" anchor="t">
+            <a:spAutoFit/>
+          </a:bodyPr>
+          <a:lstStyle/>
+          <a:p>
+            <a:pPr algn="ctr">
+              <a:lnSpc>
+                <a:spcPct val="100000"/>
+              </a:lnSpc>
+            </a:pPr>
+            <a:r>
+              <a:rPr sz="2250" b="1">
+                <a:solidFill>
+                  <a:srgbClr val="FFFFFF"/>
+                </a:solidFill>
+                <a:latin typeface="Pretendard"/>
+                <a:ea typeface="Pretendard"/>
+                <a:cs typeface="Pretendard"/>
+              </a:rPr>
+              <a:t>1</a:t>
+            </a:r>
+          </a:p>
+        </p:txBody>
+      </p:sp>
+      <p:sp>
+        <p:nvSpPr>
+          <p:cNvPr id="11" name="TextBox 10"/>
+          <p:cNvSpPr txBox="1"/>
+          <p:nvPr/>
+        </p:nvSpPr>
+        <p:spPr>
+          <a:xfrm>
+            <a:off x="2324100" y="3024188"/>
+            <a:ext cx="14478000" cy="400050"/>
+          </a:xfrm>
+          <a:prstGeom prst="rect">
+            <a:avLst/>
+          </a:prstGeom>
+          <a:noFill/>
+        </p:spPr>
+        <p:txBody>
+          <a:bodyPr wrap="square" lIns="0" rIns="0" tIns="0" bIns="0" anchor="t">
+            <a:spAutoFit/>
+          </a:bodyPr>
+          <a:lstStyle/>
+          <a:p>
+            <a:pPr algn="l">
+              <a:lnSpc>
+                <a:spcPct val="110000"/>
+              </a:lnSpc>
+            </a:pPr>
+            <a:r>
+              <a:rPr sz="2475" b="1">
+                <a:solidFill>
+                  <a:srgbClr val="0D2B5E"/>
+                </a:solidFill>
+                <a:latin typeface="Pretendard"/>
+                <a:ea typeface="Pretendard"/>
+                <a:cs typeface="Pretendard"/>
+              </a:rPr>
+              <a:t>한 열 0.0018 초 · count(*) 0.0019 초</a:t>
+            </a:r>
+          </a:p>
+        </p:txBody>
+      </p:sp>
+      <p:sp>
+        <p:nvSpPr>
           <p:cNvPr id="12" name="TextBox 11"/>
           <p:cNvSpPr txBox="1"/>
           <p:nvPr/>
         </p:nvSpPr>
         <p:spPr>
           <a:xfrm>
-            <a:off x="1390650" y="4838700"/>
-            <a:ext cx="2152015" cy="599122"/>
-          </a:xfrm>
-          <a:prstGeom prst="rect">
-            <a:avLst/>
-          </a:prstGeom>
-          <a:noFill/>
-        </p:spPr>
-        <p:txBody>
-          <a:bodyPr wrap="square" lIns="0" rIns="0" tIns="0" bIns="0" anchor="ctr">
-            <a:spAutoFit/>
-          </a:bodyPr>
-          <a:lstStyle/>
-          <a:p>
-            <a:pPr algn="ctr">
-              <a:lnSpc>
-                <a:spcPct val="100000"/>
-              </a:lnSpc>
-            </a:pPr>
-            <a:r>
-              <a:rPr sz="1200" b="1">
-                <a:solidFill>
-                  <a:srgbClr val="FFFFFF"/>
-                </a:solidFill>
-                <a:latin typeface="Pretendard"/>
-                <a:ea typeface="Pretendard"/>
-                <a:cs typeface="Pretendard"/>
-              </a:rPr>
-              <a:t>sum(value)</a:t>
+            <a:off x="2324100" y="3481388"/>
+            <a:ext cx="14478000" cy="361950"/>
+          </a:xfrm>
+          <a:prstGeom prst="rect">
+            <a:avLst/>
+          </a:prstGeom>
+          <a:noFill/>
+        </p:spPr>
+        <p:txBody>
+          <a:bodyPr wrap="square" lIns="0" rIns="0" tIns="0" bIns="0" anchor="t">
+            <a:spAutoFit/>
+          </a:bodyPr>
+          <a:lstStyle/>
+          <a:p>
+            <a:pPr algn="l">
+              <a:lnSpc>
+                <a:spcPct val="120000"/>
+              </a:lnSpc>
+            </a:pPr>
+            <a:r>
+              <a:rPr sz="2025" b="0">
+                <a:solidFill>
+                  <a:srgbClr val="3D3D3D"/>
+                </a:solidFill>
+                <a:latin typeface="Pretendard"/>
+                <a:ea typeface="Pretendard"/>
+                <a:cs typeface="Pretendard"/>
+              </a:rPr>
+              <a:t>count(*) FROM (SELECT *) 로 잰 「전부 읽기」가 같거나 오히려 빠르다</a:t>
             </a:r>
           </a:p>
         </p:txBody>
@@ -9716,12 +9752,12 @@
         </p:nvSpPr>
         <p:spPr>
           <a:xfrm>
-            <a:off x="1390650" y="5583555"/>
-            <a:ext cx="2152015" cy="1214438"/>
+            <a:off x="1143000" y="4105275"/>
+            <a:ext cx="16002000" cy="1000125"/>
           </a:xfrm>
           <a:prstGeom prst="roundRect">
             <a:avLst>
-              <a:gd name="adj" fmla="val 3921"/>
+              <a:gd name="adj" fmla="val 4761"/>
             </a:avLst>
           </a:prstGeom>
           <a:solidFill>
@@ -9744,61 +9780,20 @@
       </p:sp>
       <p:sp>
         <p:nvSpPr>
-          <p:cNvPr id="14" name="TextBox 13"/>
-          <p:cNvSpPr txBox="1"/>
-          <p:nvPr/>
-        </p:nvSpPr>
-        <p:spPr>
-          <a:xfrm>
-            <a:off x="1524000" y="5583555"/>
-            <a:ext cx="1885315" cy="1214438"/>
-          </a:xfrm>
-          <a:prstGeom prst="rect">
-            <a:avLst/>
-          </a:prstGeom>
-          <a:noFill/>
-        </p:spPr>
-        <p:txBody>
-          <a:bodyPr wrap="square" lIns="0" rIns="0" tIns="0" bIns="0" anchor="ctr">
-            <a:spAutoFit/>
-          </a:bodyPr>
-          <a:lstStyle/>
-          <a:p>
-            <a:pPr algn="ctr">
-              <a:lnSpc>
-                <a:spcPct val="135000"/>
-              </a:lnSpc>
-            </a:pPr>
-            <a:r>
-              <a:rPr sz="1500" b="0">
-                <a:solidFill>
-                  <a:srgbClr val="3D3D3D"/>
-                </a:solidFill>
-                <a:latin typeface="Pretendard"/>
-                <a:ea typeface="Pretendard"/>
-                <a:cs typeface="Pretendard"/>
-              </a:rPr>
-              <a:t>한 열만</a:t>
-            </a:r>
-          </a:p>
-        </p:txBody>
-      </p:sp>
-      <p:sp>
-        <p:nvSpPr>
-          <p:cNvPr id="15" name="Right Arrow 14"/>
-          <p:cNvSpPr/>
-          <p:nvPr/>
-        </p:nvSpPr>
-        <p:spPr>
-          <a:xfrm>
-            <a:off x="3561715" y="5049202"/>
-            <a:ext cx="172402" cy="178118"/>
-          </a:xfrm>
-          <a:prstGeom prst="rightArrow">
-            <a:avLst/>
-          </a:prstGeom>
-          <a:solidFill>
-            <a:srgbClr val="1E5BC6"/>
+          <p:cNvPr id="14" name="Oval 13"/>
+          <p:cNvSpPr/>
+          <p:nvPr/>
+        </p:nvSpPr>
+        <p:spPr>
+          <a:xfrm>
+            <a:off x="1447800" y="4310062"/>
+            <a:ext cx="590550" cy="590550"/>
+          </a:xfrm>
+          <a:prstGeom prst="ellipse">
+            <a:avLst/>
+          </a:prstGeom>
+          <a:solidFill>
+            <a:srgbClr val="0D2B5E"/>
           </a:solidFill>
           <a:ln>
             <a:noFill/>
@@ -9815,31 +9810,83 @@
       </p:sp>
       <p:sp>
         <p:nvSpPr>
-          <p:cNvPr id="16" name="Rectangle 15"/>
-          <p:cNvSpPr/>
-          <p:nvPr/>
-        </p:nvSpPr>
-        <p:spPr>
-          <a:xfrm>
-            <a:off x="3753167" y="4838700"/>
-            <a:ext cx="2152015" cy="599122"/>
-          </a:xfrm>
-          <a:prstGeom prst="rect">
-            <a:avLst/>
-          </a:prstGeom>
-          <a:solidFill>
-            <a:srgbClr val="1E5BC6"/>
-          </a:solidFill>
-          <a:ln>
-            <a:noFill/>
-          </a:ln>
-          <a:effectLst/>
-        </p:spPr>
-        <p:txBody>
-          <a:bodyPr rtlCol="0" anchor="ctr" wrap="square"/>
-          <a:lstStyle/>
-          <a:p>
-            <a:pPr algn="ctr"/>
+          <p:cNvPr id="15" name="TextBox 14"/>
+          <p:cNvSpPr txBox="1"/>
+          <p:nvPr/>
+        </p:nvSpPr>
+        <p:spPr>
+          <a:xfrm>
+            <a:off x="1447800" y="4462462"/>
+            <a:ext cx="590550" cy="323850"/>
+          </a:xfrm>
+          <a:prstGeom prst="rect">
+            <a:avLst/>
+          </a:prstGeom>
+          <a:noFill/>
+        </p:spPr>
+        <p:txBody>
+          <a:bodyPr wrap="square" lIns="0" rIns="0" tIns="0" bIns="0" anchor="t">
+            <a:spAutoFit/>
+          </a:bodyPr>
+          <a:lstStyle/>
+          <a:p>
+            <a:pPr algn="ctr">
+              <a:lnSpc>
+                <a:spcPct val="100000"/>
+              </a:lnSpc>
+            </a:pPr>
+            <a:r>
+              <a:rPr sz="2250" b="1">
+                <a:solidFill>
+                  <a:srgbClr val="FFFFFF"/>
+                </a:solidFill>
+                <a:latin typeface="Pretendard"/>
+                <a:ea typeface="Pretendard"/>
+                <a:cs typeface="Pretendard"/>
+              </a:rPr>
+              <a:t>2</a:t>
+            </a:r>
+          </a:p>
+        </p:txBody>
+      </p:sp>
+      <p:sp>
+        <p:nvSpPr>
+          <p:cNvPr id="16" name="TextBox 15"/>
+          <p:cNvSpPr txBox="1"/>
+          <p:nvPr/>
+        </p:nvSpPr>
+        <p:spPr>
+          <a:xfrm>
+            <a:off x="2324100" y="4195762"/>
+            <a:ext cx="14478000" cy="400050"/>
+          </a:xfrm>
+          <a:prstGeom prst="rect">
+            <a:avLst/>
+          </a:prstGeom>
+          <a:noFill/>
+        </p:spPr>
+        <p:txBody>
+          <a:bodyPr wrap="square" lIns="0" rIns="0" tIns="0" bIns="0" anchor="t">
+            <a:spAutoFit/>
+          </a:bodyPr>
+          <a:lstStyle/>
+          <a:p>
+            <a:pPr algn="l">
+              <a:lnSpc>
+                <a:spcPct val="110000"/>
+              </a:lnSpc>
+            </a:pPr>
+            <a:r>
+              <a:rPr sz="2475" b="1">
+                <a:solidFill>
+                  <a:srgbClr val="0D2B5E"/>
+                </a:solidFill>
+                <a:latin typeface="Pretendard"/>
+                <a:ea typeface="Pretendard"/>
+                <a:cs typeface="Pretendard"/>
+              </a:rPr>
+              <a:t>DuckDB 가 SELECT * 를 걷어 냈다</a:t>
+            </a:r>
           </a:p>
         </p:txBody>
       </p:sp>
@@ -9851,35 +9898,35 @@
         </p:nvSpPr>
         <p:spPr>
           <a:xfrm>
-            <a:off x="3753167" y="4838700"/>
-            <a:ext cx="2152015" cy="599122"/>
-          </a:xfrm>
-          <a:prstGeom prst="rect">
-            <a:avLst/>
-          </a:prstGeom>
-          <a:noFill/>
-        </p:spPr>
-        <p:txBody>
-          <a:bodyPr wrap="square" lIns="0" rIns="0" tIns="0" bIns="0" anchor="ctr">
-            <a:spAutoFit/>
-          </a:bodyPr>
-          <a:lstStyle/>
-          <a:p>
-            <a:pPr algn="ctr">
-              <a:lnSpc>
-                <a:spcPct val="100000"/>
-              </a:lnSpc>
-            </a:pPr>
-            <a:r>
-              <a:rPr sz="1200" b="1">
-                <a:solidFill>
-                  <a:srgbClr val="FFFFFF"/>
-                </a:solidFill>
-                <a:latin typeface="Pretendard"/>
-                <a:ea typeface="Pretendard"/>
-                <a:cs typeface="Pretendard"/>
-              </a:rPr>
-              <a:t>count(*) FROM (SELECT *)</a:t>
+            <a:off x="2324100" y="4652962"/>
+            <a:ext cx="14478000" cy="361950"/>
+          </a:xfrm>
+          <a:prstGeom prst="rect">
+            <a:avLst/>
+          </a:prstGeom>
+          <a:noFill/>
+        </p:spPr>
+        <p:txBody>
+          <a:bodyPr wrap="square" lIns="0" rIns="0" tIns="0" bIns="0" anchor="t">
+            <a:spAutoFit/>
+          </a:bodyPr>
+          <a:lstStyle/>
+          <a:p>
+            <a:pPr algn="l">
+              <a:lnSpc>
+                <a:spcPct val="120000"/>
+              </a:lnSpc>
+            </a:pPr>
+            <a:r>
+              <a:rPr sz="2025" b="0">
+                <a:solidFill>
+                  <a:srgbClr val="3D3D3D"/>
+                </a:solidFill>
+                <a:latin typeface="Pretendard"/>
+                <a:ea typeface="Pretendard"/>
+                <a:cs typeface="Pretendard"/>
+              </a:rPr>
+              <a:t>Parquet 꼬리말의 행 수만 읽었다 — 열을 하나도 읽지 않은 것</a:t>
             </a:r>
           </a:p>
         </p:txBody>
@@ -9892,12 +9939,12 @@
         </p:nvSpPr>
         <p:spPr>
           <a:xfrm>
-            <a:off x="3753167" y="5583555"/>
-            <a:ext cx="2152015" cy="1214438"/>
+            <a:off x="1143000" y="5276850"/>
+            <a:ext cx="16002000" cy="1000125"/>
           </a:xfrm>
           <a:prstGeom prst="roundRect">
             <a:avLst>
-              <a:gd name="adj" fmla="val 3921"/>
+              <a:gd name="adj" fmla="val 4761"/>
             </a:avLst>
           </a:prstGeom>
           <a:solidFill>
@@ -9920,61 +9967,20 @@
       </p:sp>
       <p:sp>
         <p:nvSpPr>
-          <p:cNvPr id="19" name="TextBox 18"/>
-          <p:cNvSpPr txBox="1"/>
-          <p:nvPr/>
-        </p:nvSpPr>
-        <p:spPr>
-          <a:xfrm>
-            <a:off x="3886517" y="5583555"/>
-            <a:ext cx="1885315" cy="1214438"/>
-          </a:xfrm>
-          <a:prstGeom prst="rect">
-            <a:avLst/>
-          </a:prstGeom>
-          <a:noFill/>
-        </p:spPr>
-        <p:txBody>
-          <a:bodyPr wrap="square" lIns="0" rIns="0" tIns="0" bIns="0" anchor="ctr">
-            <a:spAutoFit/>
-          </a:bodyPr>
-          <a:lstStyle/>
-          <a:p>
-            <a:pPr algn="ctr">
-              <a:lnSpc>
-                <a:spcPct val="135000"/>
-              </a:lnSpc>
-            </a:pPr>
-            <a:r>
-              <a:rPr sz="1500" b="0">
-                <a:solidFill>
-                  <a:srgbClr val="3D3D3D"/>
-                </a:solidFill>
-                <a:latin typeface="Pretendard"/>
-                <a:ea typeface="Pretendard"/>
-                <a:cs typeface="Pretendard"/>
-              </a:rPr>
-              <a:t>전부 읽기</a:t>
-            </a:r>
-          </a:p>
-        </p:txBody>
-      </p:sp>
-      <p:sp>
-        <p:nvSpPr>
-          <p:cNvPr id="20" name="Right Arrow 19"/>
-          <p:cNvSpPr/>
-          <p:nvPr/>
-        </p:nvSpPr>
-        <p:spPr>
-          <a:xfrm>
-            <a:off x="5924232" y="5049202"/>
-            <a:ext cx="172402" cy="178118"/>
-          </a:xfrm>
-          <a:prstGeom prst="rightArrow">
-            <a:avLst/>
-          </a:prstGeom>
-          <a:solidFill>
-            <a:srgbClr val="1E5BC6"/>
+          <p:cNvPr id="19" name="Oval 18"/>
+          <p:cNvSpPr/>
+          <p:nvPr/>
+        </p:nvSpPr>
+        <p:spPr>
+          <a:xfrm>
+            <a:off x="1447800" y="5481638"/>
+            <a:ext cx="590550" cy="590550"/>
+          </a:xfrm>
+          <a:prstGeom prst="ellipse">
+            <a:avLst/>
+          </a:prstGeom>
+          <a:solidFill>
+            <a:srgbClr val="0D2B5E"/>
           </a:solidFill>
           <a:ln>
             <a:noFill/>
@@ -9991,31 +9997,83 @@
       </p:sp>
       <p:sp>
         <p:nvSpPr>
-          <p:cNvPr id="21" name="Rectangle 20"/>
-          <p:cNvSpPr/>
-          <p:nvPr/>
-        </p:nvSpPr>
-        <p:spPr>
-          <a:xfrm>
-            <a:off x="6115685" y="4838700"/>
-            <a:ext cx="2152015" cy="599122"/>
-          </a:xfrm>
-          <a:prstGeom prst="rect">
-            <a:avLst/>
-          </a:prstGeom>
-          <a:solidFill>
-            <a:srgbClr val="0D2B5E"/>
-          </a:solidFill>
-          <a:ln>
-            <a:noFill/>
-          </a:ln>
-          <a:effectLst/>
-        </p:spPr>
-        <p:txBody>
-          <a:bodyPr rtlCol="0" anchor="ctr" wrap="square"/>
-          <a:lstStyle/>
-          <a:p>
-            <a:pPr algn="ctr"/>
+          <p:cNvPr id="20" name="TextBox 19"/>
+          <p:cNvSpPr txBox="1"/>
+          <p:nvPr/>
+        </p:nvSpPr>
+        <p:spPr>
+          <a:xfrm>
+            <a:off x="1447800" y="5634038"/>
+            <a:ext cx="590550" cy="323850"/>
+          </a:xfrm>
+          <a:prstGeom prst="rect">
+            <a:avLst/>
+          </a:prstGeom>
+          <a:noFill/>
+        </p:spPr>
+        <p:txBody>
+          <a:bodyPr wrap="square" lIns="0" rIns="0" tIns="0" bIns="0" anchor="t">
+            <a:spAutoFit/>
+          </a:bodyPr>
+          <a:lstStyle/>
+          <a:p>
+            <a:pPr algn="ctr">
+              <a:lnSpc>
+                <a:spcPct val="100000"/>
+              </a:lnSpc>
+            </a:pPr>
+            <a:r>
+              <a:rPr sz="2250" b="1">
+                <a:solidFill>
+                  <a:srgbClr val="FFFFFF"/>
+                </a:solidFill>
+                <a:latin typeface="Pretendard"/>
+                <a:ea typeface="Pretendard"/>
+                <a:cs typeface="Pretendard"/>
+              </a:rPr>
+              <a:t>3</a:t>
+            </a:r>
+          </a:p>
+        </p:txBody>
+      </p:sp>
+      <p:sp>
+        <p:nvSpPr>
+          <p:cNvPr id="21" name="TextBox 20"/>
+          <p:cNvSpPr txBox="1"/>
+          <p:nvPr/>
+        </p:nvSpPr>
+        <p:spPr>
+          <a:xfrm>
+            <a:off x="2324100" y="5367338"/>
+            <a:ext cx="14478000" cy="400050"/>
+          </a:xfrm>
+          <a:prstGeom prst="rect">
+            <a:avLst/>
+          </a:prstGeom>
+          <a:noFill/>
+        </p:spPr>
+        <p:txBody>
+          <a:bodyPr wrap="square" lIns="0" rIns="0" tIns="0" bIns="0" anchor="t">
+            <a:spAutoFit/>
+          </a:bodyPr>
+          <a:lstStyle/>
+          <a:p>
+            <a:pPr algn="l">
+              <a:lnSpc>
+                <a:spcPct val="110000"/>
+              </a:lnSpc>
+            </a:pPr>
+            <a:r>
+              <a:rPr sz="2475" b="1">
+                <a:solidFill>
+                  <a:srgbClr val="0D2B5E"/>
+                </a:solidFill>
+                <a:latin typeface="Pretendard"/>
+                <a:ea typeface="Pretendard"/>
+                <a:cs typeface="Pretendard"/>
+              </a:rPr>
+              <a:t>다섯 열을 실제로 쓰게 — 열마다 집계 하나</a:t>
+            </a:r>
           </a:p>
         </p:txBody>
       </p:sp>
@@ -10027,35 +10085,35 @@
         </p:nvSpPr>
         <p:spPr>
           <a:xfrm>
-            <a:off x="6115685" y="4838700"/>
-            <a:ext cx="2152015" cy="599122"/>
-          </a:xfrm>
-          <a:prstGeom prst="rect">
-            <a:avLst/>
-          </a:prstGeom>
-          <a:noFill/>
-        </p:spPr>
-        <p:txBody>
-          <a:bodyPr wrap="square" lIns="0" rIns="0" tIns="0" bIns="0" anchor="ctr">
-            <a:spAutoFit/>
-          </a:bodyPr>
-          <a:lstStyle/>
-          <a:p>
-            <a:pPr algn="ctr">
-              <a:lnSpc>
-                <a:spcPct val="100000"/>
-              </a:lnSpc>
-            </a:pPr>
-            <a:r>
-              <a:rPr sz="1200" b="1">
-                <a:solidFill>
-                  <a:srgbClr val="FFFFFF"/>
-                </a:solidFill>
-                <a:latin typeface="Pretendard"/>
-                <a:ea typeface="Pretendard"/>
-                <a:cs typeface="Pretendard"/>
-              </a:rPr>
-              <a:t>차이 크다</a:t>
+            <a:off x="2324100" y="5824538"/>
+            <a:ext cx="14478000" cy="361950"/>
+          </a:xfrm>
+          <a:prstGeom prst="rect">
+            <a:avLst/>
+          </a:prstGeom>
+          <a:noFill/>
+        </p:spPr>
+        <p:txBody>
+          <a:bodyPr wrap="square" lIns="0" rIns="0" tIns="0" bIns="0" anchor="t">
+            <a:spAutoFit/>
+          </a:bodyPr>
+          <a:lstStyle/>
+          <a:p>
+            <a:pPr algn="l">
+              <a:lnSpc>
+                <a:spcPct val="120000"/>
+              </a:lnSpc>
+            </a:pPr>
+            <a:r>
+              <a:rPr sz="2025" b="0">
+                <a:solidFill>
+                  <a:srgbClr val="3D3D3D"/>
+                </a:solidFill>
+                <a:latin typeface="Pretendard"/>
+                <a:ea typeface="Pretendard"/>
+                <a:cs typeface="Pretendard"/>
+              </a:rPr>
+              <a:t>다섯 열 0.0150 초, 한 열의 8.1배(돌릴 때마다 4~8배)</a:t>
             </a:r>
           </a:p>
         </p:txBody>
@@ -10068,12 +10126,12 @@
         </p:nvSpPr>
         <p:spPr>
           <a:xfrm>
-            <a:off x="6115685" y="5583555"/>
-            <a:ext cx="2152015" cy="1214438"/>
+            <a:off x="1143000" y="6448425"/>
+            <a:ext cx="16002000" cy="1000125"/>
           </a:xfrm>
           <a:prstGeom prst="roundRect">
             <a:avLst>
-              <a:gd name="adj" fmla="val 3921"/>
+              <a:gd name="adj" fmla="val 4761"/>
             </a:avLst>
           </a:prstGeom>
           <a:solidFill>
@@ -10096,173 +10154,16 @@
       </p:sp>
       <p:sp>
         <p:nvSpPr>
-          <p:cNvPr id="24" name="TextBox 23"/>
-          <p:cNvSpPr txBox="1"/>
-          <p:nvPr/>
-        </p:nvSpPr>
-        <p:spPr>
-          <a:xfrm>
-            <a:off x="6249035" y="5583555"/>
-            <a:ext cx="1885315" cy="1214438"/>
-          </a:xfrm>
-          <a:prstGeom prst="rect">
-            <a:avLst/>
-          </a:prstGeom>
-          <a:noFill/>
-        </p:spPr>
-        <p:txBody>
-          <a:bodyPr wrap="square" lIns="0" rIns="0" tIns="0" bIns="0" anchor="ctr">
-            <a:spAutoFit/>
-          </a:bodyPr>
-          <a:lstStyle/>
-          <a:p>
-            <a:pPr algn="ctr">
-              <a:lnSpc>
-                <a:spcPct val="135000"/>
-              </a:lnSpc>
-            </a:pPr>
-            <a:r>
-              <a:rPr sz="1500" b="0">
-                <a:solidFill>
-                  <a:srgbClr val="3D3D3D"/>
-                </a:solidFill>
-                <a:latin typeface="Pretendard"/>
-                <a:ea typeface="Pretendard"/>
-                <a:cs typeface="Pretendard"/>
-              </a:rPr>
-              <a:t>열만 골라 읽음</a:t>
-            </a:r>
-          </a:p>
-        </p:txBody>
-      </p:sp>
-      <p:sp>
-        <p:nvSpPr>
-          <p:cNvPr id="25" name="TextBox 24"/>
-          <p:cNvSpPr txBox="1"/>
-          <p:nvPr/>
-        </p:nvSpPr>
-        <p:spPr>
-          <a:xfrm>
-            <a:off x="9772650" y="2857500"/>
-            <a:ext cx="7372350" cy="533400"/>
-          </a:xfrm>
-          <a:prstGeom prst="rect">
-            <a:avLst/>
-          </a:prstGeom>
-          <a:noFill/>
-        </p:spPr>
-        <p:txBody>
-          <a:bodyPr wrap="square" lIns="0" rIns="0" tIns="0" bIns="0" anchor="t">
-            <a:spAutoFit/>
-          </a:bodyPr>
-          <a:lstStyle/>
-          <a:p>
-            <a:pPr algn="l">
-              <a:lnSpc>
-                <a:spcPct val="110000"/>
-              </a:lnSpc>
-            </a:pPr>
-            <a:r>
-              <a:rPr sz="3150" b="1">
-                <a:solidFill>
-                  <a:srgbClr val="0D2B5E"/>
-                </a:solidFill>
-                <a:latin typeface="Pretendard"/>
-                <a:ea typeface="Pretendard"/>
-                <a:cs typeface="Pretendard"/>
-              </a:rPr>
-              <a:t>CSV</a:t>
-            </a:r>
-          </a:p>
-        </p:txBody>
-      </p:sp>
-      <p:sp>
-        <p:nvSpPr>
-          <p:cNvPr id="26" name="TextBox 25"/>
-          <p:cNvSpPr txBox="1"/>
-          <p:nvPr/>
-        </p:nvSpPr>
-        <p:spPr>
-          <a:xfrm>
-            <a:off x="9772650" y="3467100"/>
-            <a:ext cx="7372350" cy="876300"/>
-          </a:xfrm>
-          <a:prstGeom prst="rect">
-            <a:avLst/>
-          </a:prstGeom>
-          <a:noFill/>
-        </p:spPr>
-        <p:txBody>
-          <a:bodyPr wrap="square" lIns="0" rIns="0" tIns="0" bIns="0" anchor="t">
-            <a:spAutoFit/>
-          </a:bodyPr>
-          <a:lstStyle/>
-          <a:p>
-            <a:pPr algn="l">
-              <a:lnSpc>
-                <a:spcPct val="146000"/>
-              </a:lnSpc>
-            </a:pPr>
-            <a:r>
-              <a:rPr sz="2250" b="0">
-                <a:solidFill>
-                  <a:srgbClr val="3D3D3D"/>
-                </a:solidFill>
-                <a:latin typeface="Pretendard"/>
-                <a:ea typeface="Pretendard"/>
-                <a:cs typeface="Pretendard"/>
-              </a:rPr>
-              <a:t>어느 쪽이든 전체를 파싱해야 해 차이가 작다</a:t>
-            </a:r>
-          </a:p>
-        </p:txBody>
-      </p:sp>
-      <p:sp>
-        <p:nvSpPr>
-          <p:cNvPr id="27" name="Rounded Rectangle 26"/>
-          <p:cNvSpPr/>
-          <p:nvPr/>
-        </p:nvSpPr>
-        <p:spPr>
-          <a:xfrm>
-            <a:off x="9772650" y="4610100"/>
-            <a:ext cx="7372350" cy="2857500"/>
-          </a:xfrm>
-          <a:prstGeom prst="roundRect">
-            <a:avLst>
-              <a:gd name="adj" fmla="val 1666"/>
-            </a:avLst>
-          </a:prstGeom>
-          <a:solidFill>
-            <a:srgbClr val="FAFBFD"/>
-          </a:solidFill>
-          <a:ln w="9525">
-            <a:solidFill>
-              <a:srgbClr val="DCE1E8"/>
-            </a:solidFill>
-          </a:ln>
-          <a:effectLst/>
-        </p:spPr>
-        <p:txBody>
-          <a:bodyPr rtlCol="0" anchor="ctr" wrap="square"/>
-          <a:lstStyle/>
-          <a:p>
-            <a:pPr algn="ctr"/>
-          </a:p>
-        </p:txBody>
-      </p:sp>
-      <p:sp>
-        <p:nvSpPr>
-          <p:cNvPr id="28" name="Rectangle 27"/>
-          <p:cNvSpPr/>
-          <p:nvPr/>
-        </p:nvSpPr>
-        <p:spPr>
-          <a:xfrm>
-            <a:off x="10020300" y="4838700"/>
-            <a:ext cx="2152015" cy="599122"/>
-          </a:xfrm>
-          <a:prstGeom prst="rect">
+          <p:cNvPr id="24" name="Oval 23"/>
+          <p:cNvSpPr/>
+          <p:nvPr/>
+        </p:nvSpPr>
+        <p:spPr>
+          <a:xfrm>
+            <a:off x="1447800" y="6653212"/>
+            <a:ext cx="590550" cy="590550"/>
+          </a:xfrm>
+          <a:prstGeom prst="ellipse">
             <a:avLst/>
           </a:prstGeom>
           <a:solidFill>
@@ -10283,22 +10184,22 @@
       </p:sp>
       <p:sp>
         <p:nvSpPr>
-          <p:cNvPr id="29" name="TextBox 28"/>
-          <p:cNvSpPr txBox="1"/>
-          <p:nvPr/>
-        </p:nvSpPr>
-        <p:spPr>
-          <a:xfrm>
-            <a:off x="10020300" y="4838700"/>
-            <a:ext cx="2152015" cy="599122"/>
-          </a:xfrm>
-          <a:prstGeom prst="rect">
-            <a:avLst/>
-          </a:prstGeom>
-          <a:noFill/>
-        </p:spPr>
-        <p:txBody>
-          <a:bodyPr wrap="square" lIns="0" rIns="0" tIns="0" bIns="0" anchor="ctr">
+          <p:cNvPr id="25" name="TextBox 24"/>
+          <p:cNvSpPr txBox="1"/>
+          <p:nvPr/>
+        </p:nvSpPr>
+        <p:spPr>
+          <a:xfrm>
+            <a:off x="1447800" y="6805612"/>
+            <a:ext cx="590550" cy="323850"/>
+          </a:xfrm>
+          <a:prstGeom prst="rect">
+            <a:avLst/>
+          </a:prstGeom>
+          <a:noFill/>
+        </p:spPr>
+        <p:txBody>
+          <a:bodyPr wrap="square" lIns="0" rIns="0" tIns="0" bIns="0" anchor="t">
             <a:spAutoFit/>
           </a:bodyPr>
           <a:lstStyle/>
@@ -10309,7 +10210,7 @@
               </a:lnSpc>
             </a:pPr>
             <a:r>
-              <a:rPr sz="1200" b="1">
+              <a:rPr sz="2250" b="1">
                 <a:solidFill>
                   <a:srgbClr val="FFFFFF"/>
                 </a:solidFill>
@@ -10317,74 +10218,81 @@
                 <a:ea typeface="Pretendard"/>
                 <a:cs typeface="Pretendard"/>
               </a:rPr>
-              <a:t>sum(value)</a:t>
-            </a:r>
-          </a:p>
-        </p:txBody>
-      </p:sp>
-      <p:sp>
-        <p:nvSpPr>
-          <p:cNvPr id="30" name="Rounded Rectangle 29"/>
-          <p:cNvSpPr/>
-          <p:nvPr/>
-        </p:nvSpPr>
-        <p:spPr>
-          <a:xfrm>
-            <a:off x="10020300" y="5583555"/>
-            <a:ext cx="2152015" cy="1214438"/>
-          </a:xfrm>
-          <a:prstGeom prst="roundRect">
-            <a:avLst>
-              <a:gd name="adj" fmla="val 3921"/>
-            </a:avLst>
-          </a:prstGeom>
-          <a:solidFill>
-            <a:srgbClr val="FAFBFD"/>
-          </a:solidFill>
-          <a:ln w="9525">
-            <a:solidFill>
-              <a:srgbClr val="DCE1E8"/>
-            </a:solidFill>
-          </a:ln>
-          <a:effectLst/>
-        </p:spPr>
-        <p:txBody>
-          <a:bodyPr rtlCol="0" anchor="ctr" wrap="square"/>
-          <a:lstStyle/>
-          <a:p>
-            <a:pPr algn="ctr"/>
-          </a:p>
-        </p:txBody>
-      </p:sp>
-      <p:sp>
-        <p:nvSpPr>
-          <p:cNvPr id="31" name="TextBox 30"/>
-          <p:cNvSpPr txBox="1"/>
-          <p:nvPr/>
-        </p:nvSpPr>
-        <p:spPr>
-          <a:xfrm>
-            <a:off x="10153650" y="5583555"/>
-            <a:ext cx="1885315" cy="1214438"/>
-          </a:xfrm>
-          <a:prstGeom prst="rect">
-            <a:avLst/>
-          </a:prstGeom>
-          <a:noFill/>
-        </p:spPr>
-        <p:txBody>
-          <a:bodyPr wrap="square" lIns="0" rIns="0" tIns="0" bIns="0" anchor="ctr">
-            <a:spAutoFit/>
-          </a:bodyPr>
-          <a:lstStyle/>
-          <a:p>
-            <a:pPr algn="ctr">
-              <a:lnSpc>
-                <a:spcPct val="135000"/>
-              </a:lnSpc>
-            </a:pPr>
-            <a:r>
-              <a:rPr sz="1500" b="0">
+              <a:t>4</a:t>
+            </a:r>
+          </a:p>
+        </p:txBody>
+      </p:sp>
+      <p:sp>
+        <p:nvSpPr>
+          <p:cNvPr id="26" name="TextBox 25"/>
+          <p:cNvSpPr txBox="1"/>
+          <p:nvPr/>
+        </p:nvSpPr>
+        <p:spPr>
+          <a:xfrm>
+            <a:off x="2324100" y="6538912"/>
+            <a:ext cx="14478000" cy="400050"/>
+          </a:xfrm>
+          <a:prstGeom prst="rect">
+            <a:avLst/>
+          </a:prstGeom>
+          <a:noFill/>
+        </p:spPr>
+        <p:txBody>
+          <a:bodyPr wrap="square" lIns="0" rIns="0" tIns="0" bIns="0" anchor="t">
+            <a:spAutoFit/>
+          </a:bodyPr>
+          <a:lstStyle/>
+          <a:p>
+            <a:pPr algn="l">
+              <a:lnSpc>
+                <a:spcPct val="110000"/>
+              </a:lnSpc>
+            </a:pPr>
+            <a:r>
+              <a:rPr sz="2475" b="1">
+                <a:solidFill>
+                  <a:srgbClr val="0D2B5E"/>
+                </a:solidFill>
+                <a:latin typeface="Pretendard"/>
+                <a:ea typeface="Pretendard"/>
+                <a:cs typeface="Pretendard"/>
+              </a:rPr>
+              <a:t>CSV 는 한 열 0.208 · 다섯 열 0.257 초</a:t>
+            </a:r>
+          </a:p>
+        </p:txBody>
+      </p:sp>
+      <p:sp>
+        <p:nvSpPr>
+          <p:cNvPr id="27" name="TextBox 26"/>
+          <p:cNvSpPr txBox="1"/>
+          <p:nvPr/>
+        </p:nvSpPr>
+        <p:spPr>
+          <a:xfrm>
+            <a:off x="2324100" y="6996112"/>
+            <a:ext cx="14478000" cy="361950"/>
+          </a:xfrm>
+          <a:prstGeom prst="rect">
+            <a:avLst/>
+          </a:prstGeom>
+          <a:noFill/>
+        </p:spPr>
+        <p:txBody>
+          <a:bodyPr wrap="square" lIns="0" rIns="0" tIns="0" bIns="0" anchor="t">
+            <a:spAutoFit/>
+          </a:bodyPr>
+          <a:lstStyle/>
+          <a:p>
+            <a:pPr algn="l">
+              <a:lnSpc>
+                <a:spcPct val="120000"/>
+              </a:lnSpc>
+            </a:pPr>
+            <a:r>
+              <a:rPr sz="2025" b="0">
                 <a:solidFill>
                   <a:srgbClr val="3D3D3D"/>
                 </a:solidFill>
@@ -10392,27 +10300,27 @@
                 <a:ea typeface="Pretendard"/>
                 <a:cs typeface="Pretendard"/>
               </a:rPr>
-              <a:t>전체 파싱</a:t>
-            </a:r>
-          </a:p>
-        </p:txBody>
-      </p:sp>
-      <p:sp>
-        <p:nvSpPr>
-          <p:cNvPr id="32" name="Right Arrow 31"/>
-          <p:cNvSpPr/>
-          <p:nvPr/>
-        </p:nvSpPr>
-        <p:spPr>
-          <a:xfrm>
-            <a:off x="12191365" y="5049202"/>
-            <a:ext cx="172402" cy="178118"/>
-          </a:xfrm>
-          <a:prstGeom prst="rightArrow">
-            <a:avLst/>
-          </a:prstGeom>
-          <a:solidFill>
-            <a:srgbClr val="1E5BC6"/>
+              <a:t>어느 쪽이든 글자 전체를 읽어야 해 차이가 작다</a:t>
+            </a:r>
+          </a:p>
+        </p:txBody>
+      </p:sp>
+      <p:sp>
+        <p:nvSpPr>
+          <p:cNvPr id="28" name="Rectangle 27"/>
+          <p:cNvSpPr/>
+          <p:nvPr/>
+        </p:nvSpPr>
+        <p:spPr>
+          <a:xfrm>
+            <a:off x="1143000" y="7581900"/>
+            <a:ext cx="38100" cy="323850"/>
+          </a:xfrm>
+          <a:prstGeom prst="rect">
+            <a:avLst/>
+          </a:prstGeom>
+          <a:solidFill>
+            <a:srgbClr val="BFD3F5"/>
           </a:solidFill>
           <a:ln>
             <a:noFill/>
@@ -10429,20 +10337,61 @@
       </p:sp>
       <p:sp>
         <p:nvSpPr>
-          <p:cNvPr id="33" name="Rectangle 32"/>
-          <p:cNvSpPr/>
-          <p:nvPr/>
-        </p:nvSpPr>
-        <p:spPr>
-          <a:xfrm>
-            <a:off x="12382818" y="4838700"/>
-            <a:ext cx="2152015" cy="599122"/>
-          </a:xfrm>
-          <a:prstGeom prst="rect">
-            <a:avLst/>
-          </a:prstGeom>
-          <a:solidFill>
-            <a:srgbClr val="1E5BC6"/>
+          <p:cNvPr id="29" name="TextBox 28"/>
+          <p:cNvSpPr txBox="1"/>
+          <p:nvPr/>
+        </p:nvSpPr>
+        <p:spPr>
+          <a:xfrm>
+            <a:off x="1314450" y="7581900"/>
+            <a:ext cx="15830550" cy="342900"/>
+          </a:xfrm>
+          <a:prstGeom prst="rect">
+            <a:avLst/>
+          </a:prstGeom>
+          <a:noFill/>
+        </p:spPr>
+        <p:txBody>
+          <a:bodyPr wrap="square" lIns="0" rIns="0" tIns="0" bIns="0" anchor="t">
+            <a:spAutoFit/>
+          </a:bodyPr>
+          <a:lstStyle/>
+          <a:p>
+            <a:pPr algn="l">
+              <a:lnSpc>
+                <a:spcPct val="100000"/>
+              </a:lnSpc>
+            </a:pPr>
+            <a:r>
+              <a:rPr sz="1725" b="1">
+                <a:solidFill>
+                  <a:srgbClr val="7D7D7D"/>
+                </a:solidFill>
+                <a:latin typeface="Pretendard"/>
+                <a:ea typeface="Pretendard"/>
+                <a:cs typeface="Pretendard"/>
+              </a:rPr>
+              <a:t>거꾸로 나오면 EXPLAIN 을 붙여 본다 — sum(value) 는 value 한 열만 읽고, count(*) 는 1행 결과만 남는다</a:t>
+            </a:r>
+          </a:p>
+        </p:txBody>
+      </p:sp>
+      <p:sp>
+        <p:nvSpPr>
+          <p:cNvPr id="30" name="Rectangle 29"/>
+          <p:cNvSpPr/>
+          <p:nvPr/>
+        </p:nvSpPr>
+        <p:spPr>
+          <a:xfrm>
+            <a:off x="1143000" y="8058150"/>
+            <a:ext cx="16002000" cy="9525"/>
+          </a:xfrm>
+          <a:prstGeom prst="rect">
+            <a:avLst/>
+          </a:prstGeom>
+          <a:solidFill>
+            <a:srgbClr val="DCE1E8"/>
           </a:solidFill>
           <a:ln>
             <a:noFill/>
@@ -10459,400 +10408,7 @@
       </p:sp>
       <p:sp>
         <p:nvSpPr>
-          <p:cNvPr id="34" name="TextBox 33"/>
-          <p:cNvSpPr txBox="1"/>
-          <p:nvPr/>
-        </p:nvSpPr>
-        <p:spPr>
-          <a:xfrm>
-            <a:off x="12382818" y="4838700"/>
-            <a:ext cx="2152015" cy="599122"/>
-          </a:xfrm>
-          <a:prstGeom prst="rect">
-            <a:avLst/>
-          </a:prstGeom>
-          <a:noFill/>
-        </p:spPr>
-        <p:txBody>
-          <a:bodyPr wrap="square" lIns="0" rIns="0" tIns="0" bIns="0" anchor="ctr">
-            <a:spAutoFit/>
-          </a:bodyPr>
-          <a:lstStyle/>
-          <a:p>
-            <a:pPr algn="ctr">
-              <a:lnSpc>
-                <a:spcPct val="100000"/>
-              </a:lnSpc>
-            </a:pPr>
-            <a:r>
-              <a:rPr sz="1200" b="1">
-                <a:solidFill>
-                  <a:srgbClr val="FFFFFF"/>
-                </a:solidFill>
-                <a:latin typeface="Pretendard"/>
-                <a:ea typeface="Pretendard"/>
-                <a:cs typeface="Pretendard"/>
-              </a:rPr>
-              <a:t>count(*) FROM (SELECT *)</a:t>
-            </a:r>
-          </a:p>
-        </p:txBody>
-      </p:sp>
-      <p:sp>
-        <p:nvSpPr>
-          <p:cNvPr id="35" name="Rounded Rectangle 34"/>
-          <p:cNvSpPr/>
-          <p:nvPr/>
-        </p:nvSpPr>
-        <p:spPr>
-          <a:xfrm>
-            <a:off x="12382818" y="5583555"/>
-            <a:ext cx="2152015" cy="1214438"/>
-          </a:xfrm>
-          <a:prstGeom prst="roundRect">
-            <a:avLst>
-              <a:gd name="adj" fmla="val 3921"/>
-            </a:avLst>
-          </a:prstGeom>
-          <a:solidFill>
-            <a:srgbClr val="FAFBFD"/>
-          </a:solidFill>
-          <a:ln w="9525">
-            <a:solidFill>
-              <a:srgbClr val="DCE1E8"/>
-            </a:solidFill>
-          </a:ln>
-          <a:effectLst/>
-        </p:spPr>
-        <p:txBody>
-          <a:bodyPr rtlCol="0" anchor="ctr" wrap="square"/>
-          <a:lstStyle/>
-          <a:p>
-            <a:pPr algn="ctr"/>
-          </a:p>
-        </p:txBody>
-      </p:sp>
-      <p:sp>
-        <p:nvSpPr>
-          <p:cNvPr id="36" name="TextBox 35"/>
-          <p:cNvSpPr txBox="1"/>
-          <p:nvPr/>
-        </p:nvSpPr>
-        <p:spPr>
-          <a:xfrm>
-            <a:off x="12516168" y="5583555"/>
-            <a:ext cx="1885315" cy="1214438"/>
-          </a:xfrm>
-          <a:prstGeom prst="rect">
-            <a:avLst/>
-          </a:prstGeom>
-          <a:noFill/>
-        </p:spPr>
-        <p:txBody>
-          <a:bodyPr wrap="square" lIns="0" rIns="0" tIns="0" bIns="0" anchor="ctr">
-            <a:spAutoFit/>
-          </a:bodyPr>
-          <a:lstStyle/>
-          <a:p>
-            <a:pPr algn="ctr">
-              <a:lnSpc>
-                <a:spcPct val="135000"/>
-              </a:lnSpc>
-            </a:pPr>
-            <a:r>
-              <a:rPr sz="1500" b="0">
-                <a:solidFill>
-                  <a:srgbClr val="3D3D3D"/>
-                </a:solidFill>
-                <a:latin typeface="Pretendard"/>
-                <a:ea typeface="Pretendard"/>
-                <a:cs typeface="Pretendard"/>
-              </a:rPr>
-              <a:t>전체 파싱</a:t>
-            </a:r>
-          </a:p>
-        </p:txBody>
-      </p:sp>
-      <p:sp>
-        <p:nvSpPr>
-          <p:cNvPr id="37" name="Right Arrow 36"/>
-          <p:cNvSpPr/>
-          <p:nvPr/>
-        </p:nvSpPr>
-        <p:spPr>
-          <a:xfrm>
-            <a:off x="14553882" y="5049202"/>
-            <a:ext cx="172402" cy="178118"/>
-          </a:xfrm>
-          <a:prstGeom prst="rightArrow">
-            <a:avLst/>
-          </a:prstGeom>
-          <a:solidFill>
-            <a:srgbClr val="1E5BC6"/>
-          </a:solidFill>
-          <a:ln>
-            <a:noFill/>
-          </a:ln>
-          <a:effectLst/>
-        </p:spPr>
-        <p:txBody>
-          <a:bodyPr rtlCol="0" anchor="ctr" wrap="square"/>
-          <a:lstStyle/>
-          <a:p>
-            <a:pPr algn="ctr"/>
-          </a:p>
-        </p:txBody>
-      </p:sp>
-      <p:sp>
-        <p:nvSpPr>
-          <p:cNvPr id="38" name="Rectangle 37"/>
-          <p:cNvSpPr/>
-          <p:nvPr/>
-        </p:nvSpPr>
-        <p:spPr>
-          <a:xfrm>
-            <a:off x="14745335" y="4838700"/>
-            <a:ext cx="2152015" cy="599122"/>
-          </a:xfrm>
-          <a:prstGeom prst="rect">
-            <a:avLst/>
-          </a:prstGeom>
-          <a:solidFill>
-            <a:srgbClr val="0D2B5E"/>
-          </a:solidFill>
-          <a:ln>
-            <a:noFill/>
-          </a:ln>
-          <a:effectLst/>
-        </p:spPr>
-        <p:txBody>
-          <a:bodyPr rtlCol="0" anchor="ctr" wrap="square"/>
-          <a:lstStyle/>
-          <a:p>
-            <a:pPr algn="ctr"/>
-          </a:p>
-        </p:txBody>
-      </p:sp>
-      <p:sp>
-        <p:nvSpPr>
-          <p:cNvPr id="39" name="TextBox 38"/>
-          <p:cNvSpPr txBox="1"/>
-          <p:nvPr/>
-        </p:nvSpPr>
-        <p:spPr>
-          <a:xfrm>
-            <a:off x="14745335" y="4838700"/>
-            <a:ext cx="2152015" cy="599122"/>
-          </a:xfrm>
-          <a:prstGeom prst="rect">
-            <a:avLst/>
-          </a:prstGeom>
-          <a:noFill/>
-        </p:spPr>
-        <p:txBody>
-          <a:bodyPr wrap="square" lIns="0" rIns="0" tIns="0" bIns="0" anchor="ctr">
-            <a:spAutoFit/>
-          </a:bodyPr>
-          <a:lstStyle/>
-          <a:p>
-            <a:pPr algn="ctr">
-              <a:lnSpc>
-                <a:spcPct val="100000"/>
-              </a:lnSpc>
-            </a:pPr>
-            <a:r>
-              <a:rPr sz="1200" b="1">
-                <a:solidFill>
-                  <a:srgbClr val="FFFFFF"/>
-                </a:solidFill>
-                <a:latin typeface="Pretendard"/>
-                <a:ea typeface="Pretendard"/>
-                <a:cs typeface="Pretendard"/>
-              </a:rPr>
-              <a:t>차이 작다</a:t>
-            </a:r>
-          </a:p>
-        </p:txBody>
-      </p:sp>
-      <p:sp>
-        <p:nvSpPr>
-          <p:cNvPr id="40" name="Rounded Rectangle 39"/>
-          <p:cNvSpPr/>
-          <p:nvPr/>
-        </p:nvSpPr>
-        <p:spPr>
-          <a:xfrm>
-            <a:off x="14745335" y="5583555"/>
-            <a:ext cx="2152015" cy="1214438"/>
-          </a:xfrm>
-          <a:prstGeom prst="roundRect">
-            <a:avLst>
-              <a:gd name="adj" fmla="val 3921"/>
-            </a:avLst>
-          </a:prstGeom>
-          <a:solidFill>
-            <a:srgbClr val="FAFBFD"/>
-          </a:solidFill>
-          <a:ln w="9525">
-            <a:solidFill>
-              <a:srgbClr val="DCE1E8"/>
-            </a:solidFill>
-          </a:ln>
-          <a:effectLst/>
-        </p:spPr>
-        <p:txBody>
-          <a:bodyPr rtlCol="0" anchor="ctr" wrap="square"/>
-          <a:lstStyle/>
-          <a:p>
-            <a:pPr algn="ctr"/>
-          </a:p>
-        </p:txBody>
-      </p:sp>
-      <p:sp>
-        <p:nvSpPr>
-          <p:cNvPr id="41" name="TextBox 40"/>
-          <p:cNvSpPr txBox="1"/>
-          <p:nvPr/>
-        </p:nvSpPr>
-        <p:spPr>
-          <a:xfrm>
-            <a:off x="14878685" y="5583555"/>
-            <a:ext cx="1885315" cy="1214438"/>
-          </a:xfrm>
-          <a:prstGeom prst="rect">
-            <a:avLst/>
-          </a:prstGeom>
-          <a:noFill/>
-        </p:spPr>
-        <p:txBody>
-          <a:bodyPr wrap="square" lIns="0" rIns="0" tIns="0" bIns="0" anchor="ctr">
-            <a:spAutoFit/>
-          </a:bodyPr>
-          <a:lstStyle/>
-          <a:p>
-            <a:pPr algn="ctr">
-              <a:lnSpc>
-                <a:spcPct val="135000"/>
-              </a:lnSpc>
-            </a:pPr>
-            <a:r>
-              <a:rPr sz="1500" b="0">
-                <a:solidFill>
-                  <a:srgbClr val="3D3D3D"/>
-                </a:solidFill>
-                <a:latin typeface="Pretendard"/>
-                <a:ea typeface="Pretendard"/>
-                <a:cs typeface="Pretendard"/>
-              </a:rPr>
-              <a:t>열 구분 없음</a:t>
-            </a:r>
-          </a:p>
-        </p:txBody>
-      </p:sp>
-      <p:sp>
-        <p:nvSpPr>
-          <p:cNvPr id="42" name="Oval 41"/>
-          <p:cNvSpPr/>
-          <p:nvPr/>
-        </p:nvSpPr>
-        <p:spPr>
-          <a:xfrm>
-            <a:off x="8686800" y="3771900"/>
-            <a:ext cx="914400" cy="914400"/>
-          </a:xfrm>
-          <a:prstGeom prst="ellipse">
-            <a:avLst/>
-          </a:prstGeom>
-          <a:solidFill>
-            <a:srgbClr val="0D2B5E"/>
-          </a:solidFill>
-          <a:ln>
-            <a:noFill/>
-          </a:ln>
-          <a:effectLst/>
-        </p:spPr>
-        <p:txBody>
-          <a:bodyPr rtlCol="0" anchor="ctr" wrap="square"/>
-          <a:lstStyle/>
-          <a:p>
-            <a:pPr algn="ctr"/>
-          </a:p>
-        </p:txBody>
-      </p:sp>
-      <p:sp>
-        <p:nvSpPr>
-          <p:cNvPr id="43" name="TextBox 42"/>
-          <p:cNvSpPr txBox="1"/>
-          <p:nvPr/>
-        </p:nvSpPr>
-        <p:spPr>
-          <a:xfrm>
-            <a:off x="8686800" y="4057650"/>
-            <a:ext cx="914400" cy="381000"/>
-          </a:xfrm>
-          <a:prstGeom prst="rect">
-            <a:avLst/>
-          </a:prstGeom>
-          <a:noFill/>
-        </p:spPr>
-        <p:txBody>
-          <a:bodyPr wrap="square" lIns="0" rIns="0" tIns="0" bIns="0" anchor="t">
-            <a:spAutoFit/>
-          </a:bodyPr>
-          <a:lstStyle/>
-          <a:p>
-            <a:pPr algn="ctr">
-              <a:lnSpc>
-                <a:spcPct val="100000"/>
-              </a:lnSpc>
-            </a:pPr>
-            <a:r>
-              <a:rPr sz="2250" b="1">
-                <a:solidFill>
-                  <a:srgbClr val="FFFFFF"/>
-                </a:solidFill>
-                <a:latin typeface="Pretendard"/>
-                <a:ea typeface="Pretendard"/>
-                <a:cs typeface="Pretendard"/>
-              </a:rPr>
-              <a:t>VS</a:t>
-            </a:r>
-          </a:p>
-        </p:txBody>
-      </p:sp>
-      <p:sp>
-        <p:nvSpPr>
-          <p:cNvPr id="44" name="Rectangle 43"/>
-          <p:cNvSpPr/>
-          <p:nvPr/>
-        </p:nvSpPr>
-        <p:spPr>
-          <a:xfrm>
-            <a:off x="1143000" y="8058150"/>
-            <a:ext cx="16002000" cy="9525"/>
-          </a:xfrm>
-          <a:prstGeom prst="rect">
-            <a:avLst/>
-          </a:prstGeom>
-          <a:solidFill>
-            <a:srgbClr val="DCE1E8"/>
-          </a:solidFill>
-          <a:ln>
-            <a:noFill/>
-          </a:ln>
-          <a:effectLst/>
-        </p:spPr>
-        <p:txBody>
-          <a:bodyPr rtlCol="0" anchor="ctr" wrap="square"/>
-          <a:lstStyle/>
-          <a:p>
-            <a:pPr algn="ctr"/>
-          </a:p>
-        </p:txBody>
-      </p:sp>
-      <p:sp>
-        <p:nvSpPr>
-          <p:cNvPr id="45" name="TextBox 44"/>
+          <p:cNvPr id="31" name="TextBox 30"/>
           <p:cNvSpPr txBox="1"/>
           <p:nvPr/>
         </p:nvSpPr>
@@ -10893,7 +10449,7 @@
       </p:sp>
       <p:sp>
         <p:nvSpPr>
-          <p:cNvPr id="46" name="TextBox 45"/>
+          <p:cNvPr id="32" name="TextBox 31"/>
           <p:cNvSpPr txBox="1"/>
           <p:nvPr/>
         </p:nvSpPr>
@@ -10952,7 +10508,7 @@
       <p:grpSpPr/>
       <p:sp>
         <p:nvSpPr>
-          <p:cNvPr id="2" name="Oval 1"/>
+          <p:cNvPr id="2" name="deckgen:decor"/>
           <p:cNvSpPr/>
           <p:nvPr/>
         </p:nvSpPr>
@@ -10982,7 +10538,7 @@
       </p:sp>
       <p:sp>
         <p:nvSpPr>
-          <p:cNvPr id="3" name="Oval 2"/>
+          <p:cNvPr id="3" name="deckgen:decor"/>
           <p:cNvSpPr/>
           <p:nvPr/>
         </p:nvSpPr>
@@ -11012,7 +10568,7 @@
       </p:sp>
       <p:sp>
         <p:nvSpPr>
-          <p:cNvPr id="4" name="Oval 3"/>
+          <p:cNvPr id="4" name="deckgen:decor"/>
           <p:cNvSpPr/>
           <p:nvPr/>
         </p:nvSpPr>
@@ -11117,7 +10673,7 @@
                 <a:ea typeface="Pretendard"/>
                 <a:cs typeface="Pretendard"/>
               </a:rPr>
-              <a:t>압축 3종 비교 — for comp in zstd · snappy · gzip</a:t>
+              <a:t>5단계 — 압축 3종 비교, 기본값은 snappy</a:t>
             </a:r>
           </a:p>
         </p:txBody>
@@ -11161,7 +10717,7 @@
         <p:spPr>
           <a:xfrm>
             <a:off x="1143000" y="2781300"/>
-            <a:ext cx="3802380" cy="590550"/>
+            <a:ext cx="4122420" cy="590550"/>
           </a:xfrm>
           <a:prstGeom prst="rect">
             <a:avLst/>
@@ -11191,48 +10747,48 @@
         <p:spPr>
           <a:xfrm>
             <a:off x="1143000" y="2781300"/>
+            <a:ext cx="4122420" cy="590550"/>
+          </a:xfrm>
+          <a:prstGeom prst="rect">
+            <a:avLst/>
+          </a:prstGeom>
+          <a:noFill/>
+        </p:spPr>
+        <p:txBody>
+          <a:bodyPr wrap="square" lIns="0" rIns="0" tIns="0" bIns="0" anchor="ctr">
+            <a:spAutoFit/>
+          </a:bodyPr>
+          <a:lstStyle/>
+          <a:p>
+            <a:pPr algn="ctr">
+              <a:lnSpc>
+                <a:spcPct val="100000"/>
+              </a:lnSpc>
+            </a:pPr>
+            <a:r>
+              <a:rPr sz="2025" b="1">
+                <a:solidFill>
+                  <a:srgbClr val="FFFFFF"/>
+                </a:solidFill>
+                <a:latin typeface="Pretendard"/>
+                <a:ea typeface="Pretendard"/>
+                <a:cs typeface="Pretendard"/>
+              </a:rPr>
+              <a:t>COMPRESSION</a:t>
+            </a:r>
+          </a:p>
+        </p:txBody>
+      </p:sp>
+      <p:sp>
+        <p:nvSpPr>
+          <p:cNvPr id="10" name="Rectangle 9"/>
+          <p:cNvSpPr/>
+          <p:nvPr/>
+        </p:nvSpPr>
+        <p:spPr>
+          <a:xfrm>
+            <a:off x="5303520" y="2781300"/>
             <a:ext cx="3802380" cy="590550"/>
-          </a:xfrm>
-          <a:prstGeom prst="rect">
-            <a:avLst/>
-          </a:prstGeom>
-          <a:noFill/>
-        </p:spPr>
-        <p:txBody>
-          <a:bodyPr wrap="square" lIns="0" rIns="0" tIns="0" bIns="0" anchor="ctr">
-            <a:spAutoFit/>
-          </a:bodyPr>
-          <a:lstStyle/>
-          <a:p>
-            <a:pPr algn="ctr">
-              <a:lnSpc>
-                <a:spcPct val="100000"/>
-              </a:lnSpc>
-            </a:pPr>
-            <a:r>
-              <a:rPr sz="2025" b="1">
-                <a:solidFill>
-                  <a:srgbClr val="FFFFFF"/>
-                </a:solidFill>
-                <a:latin typeface="Pretendard"/>
-                <a:ea typeface="Pretendard"/>
-                <a:cs typeface="Pretendard"/>
-              </a:rPr>
-              <a:t>COMPRESSION</a:t>
-            </a:r>
-          </a:p>
-        </p:txBody>
-      </p:sp>
-      <p:sp>
-        <p:nvSpPr>
-          <p:cNvPr id="10" name="Rectangle 9"/>
-          <p:cNvSpPr/>
-          <p:nvPr/>
-        </p:nvSpPr>
-        <p:spPr>
-          <a:xfrm>
-            <a:off x="4983480" y="2781300"/>
-            <a:ext cx="5722620" cy="590550"/>
           </a:xfrm>
           <a:prstGeom prst="rect">
             <a:avLst/>
@@ -11261,8 +10817,8 @@
         </p:nvSpPr>
         <p:spPr>
           <a:xfrm>
-            <a:off x="4983480" y="2781300"/>
-            <a:ext cx="5722620" cy="590550"/>
+            <a:off x="5303520" y="2781300"/>
+            <a:ext cx="3802380" cy="590550"/>
           </a:xfrm>
           <a:prstGeom prst="rect">
             <a:avLst/>
@@ -11289,7 +10845,7 @@
                 <a:ea typeface="Pretendard"/>
                 <a:cs typeface="Pretendard"/>
               </a:rPr>
-              <a:t>출력 파일</a:t>
+              <a:t>크기</a:t>
             </a:r>
           </a:p>
         </p:txBody>
@@ -11302,8 +10858,8 @@
         </p:nvSpPr>
         <p:spPr>
           <a:xfrm>
-            <a:off x="10744200" y="2781300"/>
-            <a:ext cx="6400800" cy="590550"/>
+            <a:off x="9144000" y="2781300"/>
+            <a:ext cx="8001000" cy="590550"/>
           </a:xfrm>
           <a:prstGeom prst="rect">
             <a:avLst/>
@@ -11332,8 +10888,8 @@
         </p:nvSpPr>
         <p:spPr>
           <a:xfrm>
-            <a:off x="10744200" y="2781300"/>
-            <a:ext cx="6400800" cy="590550"/>
+            <a:off x="9144000" y="2781300"/>
+            <a:ext cx="8001000" cy="590550"/>
           </a:xfrm>
           <a:prstGeom prst="rect">
             <a:avLst/>
@@ -11374,7 +10930,7 @@
         <p:spPr>
           <a:xfrm>
             <a:off x="1143000" y="3448050"/>
-            <a:ext cx="3802380" cy="647700"/>
+            <a:ext cx="4122420" cy="647700"/>
           </a:xfrm>
           <a:prstGeom prst="roundRect">
             <a:avLst>
@@ -11408,7 +10964,7 @@
         <p:spPr>
           <a:xfrm>
             <a:off x="1238250" y="3448050"/>
-            <a:ext cx="3611880" cy="647700"/>
+            <a:ext cx="3931920" cy="647700"/>
           </a:xfrm>
           <a:prstGeom prst="rect">
             <a:avLst/>
@@ -11448,8 +11004,8 @@
         </p:nvSpPr>
         <p:spPr>
           <a:xfrm>
-            <a:off x="4983480" y="3448050"/>
-            <a:ext cx="5722620" cy="647700"/>
+            <a:off x="5303520" y="3448050"/>
+            <a:ext cx="3802380" cy="647700"/>
           </a:xfrm>
           <a:prstGeom prst="roundRect">
             <a:avLst>
@@ -11482,8 +11038,8 @@
         </p:nvSpPr>
         <p:spPr>
           <a:xfrm>
-            <a:off x="5078730" y="3448050"/>
-            <a:ext cx="5532120" cy="647700"/>
+            <a:off x="5398770" y="3448050"/>
+            <a:ext cx="3611880" cy="647700"/>
           </a:xfrm>
           <a:prstGeom prst="rect">
             <a:avLst/>
@@ -11510,7 +11066,7 @@
                 <a:ea typeface="Pretendard"/>
                 <a:cs typeface="Pretendard"/>
               </a:rPr>
-              <a:t>events_zstd.parquet</a:t>
+              <a:t>9.8 MB</a:t>
             </a:r>
           </a:p>
         </p:txBody>
@@ -11523,8 +11079,8 @@
         </p:nvSpPr>
         <p:spPr>
           <a:xfrm>
-            <a:off x="10744200" y="3448050"/>
-            <a:ext cx="6400800" cy="647700"/>
+            <a:off x="9144000" y="3448050"/>
+            <a:ext cx="8001000" cy="647700"/>
           </a:xfrm>
           <a:prstGeom prst="roundRect">
             <a:avLst>
@@ -11557,8 +11113,8 @@
         </p:nvSpPr>
         <p:spPr>
           <a:xfrm>
-            <a:off x="10839450" y="3448050"/>
-            <a:ext cx="6210300" cy="647700"/>
+            <a:off x="9239250" y="3448050"/>
+            <a:ext cx="7810500" cy="647700"/>
           </a:xfrm>
           <a:prstGeom prst="rect">
             <a:avLst/>
@@ -11585,7 +11141,7 @@
                 <a:ea typeface="Pretendard"/>
                 <a:cs typeface="Pretendard"/>
               </a:rPr>
-              <a:t>대체로 가장 작다 — 기본</a:t>
+              <a:t>가장 작다 — 오늘의 기본</a:t>
             </a:r>
           </a:p>
         </p:txBody>
@@ -11599,7 +11155,7 @@
         <p:spPr>
           <a:xfrm>
             <a:off x="1143000" y="4171950"/>
-            <a:ext cx="3802380" cy="647700"/>
+            <a:ext cx="4122420" cy="647700"/>
           </a:xfrm>
           <a:prstGeom prst="roundRect">
             <a:avLst>
@@ -11633,7 +11189,7 @@
         <p:spPr>
           <a:xfrm>
             <a:off x="1238250" y="4171950"/>
-            <a:ext cx="3611880" cy="647700"/>
+            <a:ext cx="3931920" cy="647700"/>
           </a:xfrm>
           <a:prstGeom prst="rect">
             <a:avLst/>
@@ -11673,8 +11229,8 @@
         </p:nvSpPr>
         <p:spPr>
           <a:xfrm>
-            <a:off x="4983480" y="4171950"/>
-            <a:ext cx="5722620" cy="647700"/>
+            <a:off x="5303520" y="4171950"/>
+            <a:ext cx="3802380" cy="647700"/>
           </a:xfrm>
           <a:prstGeom prst="roundRect">
             <a:avLst>
@@ -11707,8 +11263,8 @@
         </p:nvSpPr>
         <p:spPr>
           <a:xfrm>
-            <a:off x="5078730" y="4171950"/>
-            <a:ext cx="5532120" cy="647700"/>
+            <a:off x="5398770" y="4171950"/>
+            <a:ext cx="3611880" cy="647700"/>
           </a:xfrm>
           <a:prstGeom prst="rect">
             <a:avLst/>
@@ -11735,7 +11291,7 @@
                 <a:ea typeface="Pretendard"/>
                 <a:cs typeface="Pretendard"/>
               </a:rPr>
-              <a:t>events_snappy.parquet</a:t>
+              <a:t>15.9 MB</a:t>
             </a:r>
           </a:p>
         </p:txBody>
@@ -11748,8 +11304,8 @@
         </p:nvSpPr>
         <p:spPr>
           <a:xfrm>
-            <a:off x="10744200" y="4171950"/>
-            <a:ext cx="6400800" cy="647700"/>
+            <a:off x="9144000" y="4171950"/>
+            <a:ext cx="8001000" cy="647700"/>
           </a:xfrm>
           <a:prstGeom prst="roundRect">
             <a:avLst>
@@ -11782,8 +11338,8 @@
         </p:nvSpPr>
         <p:spPr>
           <a:xfrm>
-            <a:off x="10839450" y="4171950"/>
-            <a:ext cx="6210300" cy="647700"/>
+            <a:off x="9239250" y="4171950"/>
+            <a:ext cx="7810500" cy="647700"/>
           </a:xfrm>
           <a:prstGeom prst="rect">
             <a:avLst/>
@@ -11810,7 +11366,7 @@
                 <a:ea typeface="Pretendard"/>
                 <a:cs typeface="Pretendard"/>
               </a:rPr>
-              <a:t>속도 순위는 환경마다 다르다</a:t>
+              <a:t>안 적으면 이것(DuckDB 기본)</a:t>
             </a:r>
           </a:p>
         </p:txBody>
@@ -11824,7 +11380,7 @@
         <p:spPr>
           <a:xfrm>
             <a:off x="1143000" y="4895850"/>
-            <a:ext cx="3802380" cy="647700"/>
+            <a:ext cx="4122420" cy="647700"/>
           </a:xfrm>
           <a:prstGeom prst="roundRect">
             <a:avLst>
@@ -11858,7 +11414,7 @@
         <p:spPr>
           <a:xfrm>
             <a:off x="1238250" y="4895850"/>
-            <a:ext cx="3611880" cy="647700"/>
+            <a:ext cx="3931920" cy="647700"/>
           </a:xfrm>
           <a:prstGeom prst="rect">
             <a:avLst/>
@@ -11898,8 +11454,8 @@
         </p:nvSpPr>
         <p:spPr>
           <a:xfrm>
-            <a:off x="4983480" y="4895850"/>
-            <a:ext cx="5722620" cy="647700"/>
+            <a:off x="5303520" y="4895850"/>
+            <a:ext cx="3802380" cy="647700"/>
           </a:xfrm>
           <a:prstGeom prst="roundRect">
             <a:avLst>
@@ -11932,8 +11488,8 @@
         </p:nvSpPr>
         <p:spPr>
           <a:xfrm>
-            <a:off x="5078730" y="4895850"/>
-            <a:ext cx="5532120" cy="647700"/>
+            <a:off x="5398770" y="4895850"/>
+            <a:ext cx="3611880" cy="647700"/>
           </a:xfrm>
           <a:prstGeom prst="rect">
             <a:avLst/>
@@ -11960,7 +11516,7 @@
                 <a:ea typeface="Pretendard"/>
                 <a:cs typeface="Pretendard"/>
               </a:rPr>
-              <a:t>events_gzip.parquet</a:t>
+              <a:t>10.6 MB</a:t>
             </a:r>
           </a:p>
         </p:txBody>
@@ -11973,8 +11529,8 @@
         </p:nvSpPr>
         <p:spPr>
           <a:xfrm>
-            <a:off x="10744200" y="4895850"/>
-            <a:ext cx="6400800" cy="647700"/>
+            <a:off x="9144000" y="4895850"/>
+            <a:ext cx="8001000" cy="647700"/>
           </a:xfrm>
           <a:prstGeom prst="roundRect">
             <a:avLst>
@@ -12007,8 +11563,8 @@
         </p:nvSpPr>
         <p:spPr>
           <a:xfrm>
-            <a:off x="10839450" y="4895850"/>
-            <a:ext cx="6210300" cy="647700"/>
+            <a:off x="9239250" y="4895850"/>
+            <a:ext cx="7810500" cy="647700"/>
           </a:xfrm>
           <a:prstGeom prst="rect">
             <a:avLst/>
@@ -12035,7 +11591,7 @@
                 <a:ea typeface="Pretendard"/>
                 <a:cs typeface="Pretendard"/>
               </a:rPr>
-              <a:t>본인 수치를 기록</a:t>
+              <a:t>zstd 다음으로 작다</a:t>
             </a:r>
           </a:p>
         </p:txBody>
@@ -12076,7 +11632,7 @@
                 <a:ea typeface="Pretendard"/>
                 <a:cs typeface="Pretendard"/>
               </a:rPr>
-              <a:t>세 줄이 「이름 · MB · 초」로 찍힌다 — 크기와 속도를 실측 기록 표에 옮긴다</a:t>
+              <a:t>속도는 셋 다 0.004~0.005 초 — 이 크기에선 차이가 없다</a:t>
             </a:r>
           </a:p>
         </p:txBody>
@@ -12117,7 +11673,7 @@
                 <a:ea typeface="Pretendard"/>
                 <a:cs typeface="Pretendard"/>
               </a:rPr>
-              <a:t>SELECT * 습관이 대용량에서 그대로 비용이 되는 이유 — 열 50개 중 3개만 필요한데 * 를 쓰면 47개를 헛읽는다</a:t>
+              <a:t>압축을 적지 않은 COPY 는 snappy(15.9 MB 쪽)로 저장된다 — 오늘처럼 COMPRESSION zstd 를 적는다</a:t>
             </a:r>
           </a:p>
         </p:txBody>
@@ -12254,7 +11810,7 @@
       <p:grpSpPr/>
       <p:sp>
         <p:nvSpPr>
-          <p:cNvPr id="2" name="Oval 1"/>
+          <p:cNvPr id="2" name="deckgen:decor"/>
           <p:cNvSpPr/>
           <p:nvPr/>
         </p:nvSpPr>
@@ -12284,7 +11840,7 @@
       </p:sp>
       <p:sp>
         <p:nvSpPr>
-          <p:cNvPr id="3" name="Oval 2"/>
+          <p:cNvPr id="3" name="deckgen:decor"/>
           <p:cNvSpPr/>
           <p:nvPr/>
         </p:nvSpPr>
@@ -12314,7 +11870,7 @@
       </p:sp>
       <p:sp>
         <p:nvSpPr>
-          <p:cNvPr id="4" name="Oval 3"/>
+          <p:cNvPr id="4" name="deckgen:decor"/>
           <p:cNvSpPr/>
           <p:nvPr/>
         </p:nvSpPr>
@@ -12419,7 +11975,7 @@
                 <a:ea typeface="Pretendard"/>
                 <a:cs typeface="Pretendard"/>
               </a:rPr>
-              <a:t>파티션 COPY 를 두 번 — 둘째가 왜 실패하는지</a:t>
+              <a:t>6단계 뒤 — 옵션을 빼고 같은 폴더에 다시 쓴다</a:t>
             </a:r>
           </a:p>
         </p:txBody>
@@ -12490,7 +12046,7 @@
                 <a:ea typeface="Pretendard"/>
                 <a:cs typeface="Pretendard"/>
               </a:rPr>
-              <a:t>PARTITION_BY (event_type) 로 저장하고, OVERWRITE_OR_IGNORE 를 뺀 채 한 번 더 실행해 봅니다</a:t>
+              <a:t>speed.py 에 붙이면 그 뒤로 계속 멈춥니다 — parted_again.py 단독으로 한 번만</a:t>
             </a:r>
           </a:p>
         </p:txBody>
@@ -12636,7 +12192,7 @@
                 <a:ea typeface="Pretendard"/>
                 <a:cs typeface="Pretendard"/>
               </a:rPr>
-              <a:t>TO 'events_parted'</a:t>
+              <a:t>speed.py 6단계</a:t>
             </a:r>
           </a:p>
           <a:p>
@@ -12654,7 +12210,7 @@
                 <a:ea typeface="Pretendard"/>
                 <a:cs typeface="Pretendard"/>
               </a:rPr>
-              <a:t>event_type 별</a:t>
+              <a:t>OVERWRITE_OR_IGNORE</a:t>
             </a:r>
           </a:p>
         </p:txBody>
@@ -12800,7 +12356,7 @@
                 <a:ea typeface="Pretendard"/>
                 <a:cs typeface="Pretendard"/>
               </a:rPr>
-              <a:t>event_type=view/</a:t>
+              <a:t>폴더 셋 · 10M</a:t>
             </a:r>
           </a:p>
           <a:p>
@@ -12818,7 +12374,7 @@
                 <a:ea typeface="Pretendard"/>
                 <a:cs typeface="Pretendard"/>
               </a:rPr>
-              <a:t>폴더가 값별로</a:t>
+              <a:t>event_type=buy/…</a:t>
             </a:r>
           </a:p>
         </p:txBody>
@@ -12923,7 +12479,7 @@
                 <a:ea typeface="Pretendard"/>
                 <a:cs typeface="Pretendard"/>
               </a:rPr>
-              <a:t>옵션 빼고 재실행</a:t>
+              <a:t>parted_again.py</a:t>
             </a:r>
           </a:p>
         </p:txBody>
@@ -12964,7 +12520,7 @@
                 <a:ea typeface="Pretendard"/>
                 <a:cs typeface="Pretendard"/>
               </a:rPr>
-              <a:t>덮어쓰기 옵션</a:t>
+              <a:t>옵션을 뺀 COPY</a:t>
             </a:r>
           </a:p>
           <a:p>
@@ -12982,7 +12538,7 @@
                 <a:ea typeface="Pretendard"/>
                 <a:cs typeface="Pretendard"/>
               </a:rPr>
-              <a:t>없이 한 번 더</a:t>
+              <a:t>단독으로 한 번</a:t>
             </a:r>
           </a:p>
         </p:txBody>
@@ -13128,7 +12684,7 @@
                 <a:ea typeface="Pretendard"/>
                 <a:cs typeface="Pretendard"/>
               </a:rPr>
-              <a:t>Directory is</a:t>
+              <a:t>Directory "events_parted"</a:t>
             </a:r>
           </a:p>
           <a:p>
@@ -13146,7 +12702,7 @@
                 <a:ea typeface="Pretendard"/>
                 <a:cs typeface="Pretendard"/>
               </a:rPr>
-              <a:t>not empty</a:t>
+              <a:t>is not empty!</a:t>
             </a:r>
           </a:p>
         </p:txBody>
@@ -13251,7 +12807,7 @@
                 <a:ea typeface="Pretendard"/>
                 <a:cs typeface="Pretendard"/>
               </a:rPr>
-              <a:t>옵션 되살려 성공</a:t>
+              <a:t>해결 둘</a:t>
             </a:r>
           </a:p>
         </p:txBody>
@@ -13292,7 +12848,7 @@
                 <a:ea typeface="Pretendard"/>
                 <a:cs typeface="Pretendard"/>
               </a:rPr>
-              <a:t>옵션 되살리기</a:t>
+              <a:t>OVERWRITE 또는</a:t>
             </a:r>
           </a:p>
           <a:p>
@@ -13310,7 +12866,7 @@
                 <a:ea typeface="Pretendard"/>
                 <a:cs typeface="Pretendard"/>
               </a:rPr>
-              <a:t>또는 폴더 삭제</a:t>
+              <a:t>OVERWRITE_OR_IGNORE</a:t>
             </a:r>
           </a:p>
         </p:txBody>
@@ -13447,7 +13003,7 @@
       <p:grpSpPr/>
       <p:sp>
         <p:nvSpPr>
-          <p:cNvPr id="2" name="Oval 1"/>
+          <p:cNvPr id="2" name="deckgen:decor"/>
           <p:cNvSpPr/>
           <p:nvPr/>
         </p:nvSpPr>
@@ -13477,7 +13033,7 @@
       </p:sp>
       <p:sp>
         <p:nvSpPr>
-          <p:cNvPr id="3" name="Oval 2"/>
+          <p:cNvPr id="3" name="deckgen:decor"/>
           <p:cNvSpPr/>
           <p:nvPr/>
         </p:nvSpPr>
@@ -13507,7 +13063,7 @@
       </p:sp>
       <p:sp>
         <p:nvSpPr>
-          <p:cNvPr id="4" name="Oval 3"/>
+          <p:cNvPr id="4" name="deckgen:decor"/>
           <p:cNvSpPr/>
           <p:nvPr/>
         </p:nvSpPr>
@@ -13829,7 +13385,7 @@
                 <a:ea typeface="Pretendard"/>
                 <a:cs typeface="Pretendard"/>
               </a:rPr>
-              <a:t>파티션된 쪽 — view·cart 폴더는 아예 열지 않는다</a:t>
+              <a:t>파티션됨 0.0031 초 — view·cart 폴더는 아예 열지 않는다</a:t>
             </a:r>
           </a:p>
         </p:txBody>
@@ -14016,7 +13572,7 @@
                 <a:ea typeface="Pretendard"/>
                 <a:cs typeface="Pretendard"/>
               </a:rPr>
-              <a:t>단일 파일 — 전체에서 골라낸다</a:t>
+              <a:t>단일 파일 0.0037 초 — 전체에서 골라낸다</a:t>
             </a:r>
           </a:p>
         </p:txBody>
@@ -14162,7 +13718,7 @@
                 <a:ea typeface="Pretendard"/>
                 <a:cs typeface="Pretendard"/>
               </a:rPr>
-              <a:t>빠르거나 비슷하게 나온다</a:t>
+              <a:t>비슷하거나 파티션 쪽이 조금 빠르다</a:t>
             </a:r>
           </a:p>
         </p:txBody>
@@ -14203,7 +13759,7 @@
                 <a:ea typeface="Pretendard"/>
                 <a:cs typeface="Pretendard"/>
               </a:rPr>
-              <a:t>지금은 데이터가 작아 차이가 작을 수 있다 — 수억 행에서는 결정적</a:t>
+              <a:t>100만 행은 작아 차이가 작다 — 수억 행에서는 결정적</a:t>
             </a:r>
           </a:p>
         </p:txBody>
@@ -14474,7 +14030,7 @@
       <p:grpSpPr/>
       <p:sp>
         <p:nvSpPr>
-          <p:cNvPr id="2" name="Oval 1"/>
+          <p:cNvPr id="2" name="deckgen:decor"/>
           <p:cNvSpPr/>
           <p:nvPr/>
         </p:nvSpPr>
@@ -14504,7 +14060,7 @@
       </p:sp>
       <p:sp>
         <p:nvSpPr>
-          <p:cNvPr id="3" name="Oval 2"/>
+          <p:cNvPr id="3" name="deckgen:decor"/>
           <p:cNvSpPr/>
           <p:nvPr/>
         </p:nvSpPr>
@@ -14534,7 +14090,7 @@
       </p:sp>
       <p:sp>
         <p:nvSpPr>
-          <p:cNvPr id="4" name="Oval 3"/>
+          <p:cNvPr id="4" name="deckgen:decor"/>
           <p:cNvSpPr/>
           <p:nvPr/>
         </p:nvSpPr>
@@ -14639,7 +14195,7 @@
                 <a:ea typeface="Pretendard"/>
                 <a:cs typeface="Pretendard"/>
               </a:rPr>
-              <a:t>실측 기록 표 — 3-5 설계서와 주차 산출물의 근거</a:t>
+              <a:t>7단계 — 실측기록_3-3.md 를 편집기로 week3 에</a:t>
             </a:r>
           </a:p>
         </p:txBody>
@@ -15853,7 +15409,7 @@
                 <a:ea typeface="Pretendard"/>
                 <a:cs typeface="Pretendard"/>
               </a:rPr>
-              <a:t>배</a:t>
+              <a:t>—</a:t>
             </a:r>
           </a:p>
         </p:txBody>
@@ -15928,7 +15484,7 @@
                 <a:ea typeface="Pretendard"/>
                 <a:cs typeface="Pretendard"/>
               </a:rPr>
-              <a:t>압축 비교</a:t>
+              <a:t>다섯 열 읽기</a:t>
             </a:r>
           </a:p>
         </p:txBody>
@@ -16003,7 +15559,7 @@
                 <a:ea typeface="Pretendard"/>
                 <a:cs typeface="Pretendard"/>
               </a:rPr>
-              <a:t>zstd MB</a:t>
+              <a:t>초</a:t>
             </a:r>
           </a:p>
         </p:txBody>
@@ -16078,7 +15634,7 @@
                 <a:ea typeface="Pretendard"/>
                 <a:cs typeface="Pretendard"/>
               </a:rPr>
-              <a:t>snappy MB</a:t>
+              <a:t>초</a:t>
             </a:r>
           </a:p>
         </p:txBody>
@@ -16153,7 +15709,7 @@
                 <a:ea typeface="Pretendard"/>
                 <a:cs typeface="Pretendard"/>
               </a:rPr>
-              <a:t>gzip MB</a:t>
+              <a:t>—</a:t>
             </a:r>
           </a:p>
         </p:txBody>
@@ -16194,7 +15750,7 @@
                 <a:ea typeface="Pretendard"/>
                 <a:cs typeface="Pretendard"/>
               </a:rPr>
-              <a:t>결론 한 문장 — 왜 중간 산출물을 Parquet 로 두는가</a:t>
+              <a:t>압축 비교(zstd·snappy·gzip MB) · count(*) 가 더 빨랐던 이유 · 결론 한 문장</a:t>
             </a:r>
           </a:p>
         </p:txBody>
@@ -16235,7 +15791,7 @@
                 <a:ea typeface="Pretendard"/>
                 <a:cs typeface="Pretendard"/>
               </a:rPr>
-              <a:t>수치는 환경마다 다르다 — 옆 사람과 배율이 달라도 이상하지 않다. 중요한 것은 방향: Parquet 가 작고 빠르다, 열을 적게 읽을수록 유리하다</a:t>
+              <a:t>수치는 환경마다 다르다 — 배율을 채팅에 올려 비교. 중요한 것은 방향: Parquet 가 작고 빠르다, 열을 적게 읽을수록 유리하다</a:t>
             </a:r>
           </a:p>
         </p:txBody>
